--- a/納品レポート/ホテル別レポート/ハートンホテル東品川_口コミ分析レポート.pptx
+++ b/納品レポート/ホテル別レポート/ハートンホテル東品川_口コミ分析レポート.pptx
@@ -189,10 +189,10 @@
                     <c:v>Booking.com</c:v>
                   </c:pt>
                   <c:pt idx="3">
-                    <c:v>楽天トラベル</c:v>
+                    <c:v>Agoda</c:v>
                   </c:pt>
                   <c:pt idx="4">
-                    <c:v>Agoda</c:v>
+                    <c:v>楽天トラベル</c:v>
                   </c:pt>
                   <c:pt idx="5">
                     <c:v>Google</c:v>
@@ -208,22 +208,22 @@
                 <c:formatCode>General</c:formatCode>
                 <c:ptCount val="6"/>
                 <c:pt idx="0">
-                  <c:v>9.35</c:v>
+                  <c:v>9.3</c:v>
                 </c:pt>
                 <c:pt idx="1">
-                  <c:v>8.57</c:v>
+                  <c:v>8.71</c:v>
                 </c:pt>
                 <c:pt idx="2">
                   <c:v>8.44</c:v>
                 </c:pt>
                 <c:pt idx="3">
-                  <c:v>8.41</c:v>
+                  <c:v>8.4</c:v>
                 </c:pt>
                 <c:pt idx="4">
-                  <c:v>8.25</c:v>
+                  <c:v>8.29</c:v>
                 </c:pt>
                 <c:pt idx="5">
-                  <c:v>6.91</c:v>
+                  <c:v>6.86</c:v>
                 </c:pt>
               </c:numCache>
             </c:numRef>
@@ -528,10 +528,10 @@
               <c:numCache>
                 <c:ptCount val="2"/>
                 <c:pt idx="0">
-                  <c:v>112</c:v>
+                  <c:v>55</c:v>
                 </c:pt>
                 <c:pt idx="1">
-                  <c:v>23</c:v>
+                  <c:v>12</c:v>
                 </c:pt>
               </c:numCache>
             </c:numRef>
@@ -740,22 +740,22 @@
                 <c:formatCode>General</c:formatCode>
                 <c:ptCount val="6"/>
                 <c:pt idx="0">
-                  <c:v>53</c:v>
+                  <c:v>23</c:v>
                 </c:pt>
                 <c:pt idx="1">
-                  <c:v>11</c:v>
+                  <c:v>10</c:v>
                 </c:pt>
                 <c:pt idx="2">
-                  <c:v>48</c:v>
+                  <c:v>22</c:v>
                 </c:pt>
                 <c:pt idx="3">
-                  <c:v>7</c:v>
+                  <c:v>3</c:v>
                 </c:pt>
                 <c:pt idx="4">
-                  <c:v>16</c:v>
+                  <c:v>9</c:v>
                 </c:pt>
                 <c:pt idx="5">
-                  <c:v>2</c:v>
+                  <c:v>1</c:v>
                 </c:pt>
               </c:numCache>
             </c:numRef>
@@ -2686,7 +2686,7 @@
                 <a:ea typeface="Arial" pitchFamily="34" charset="-122"/>
                 <a:cs typeface="Arial" pitchFamily="34" charset="-120"/>
               </a:rPr>
-              <a:t>分析対象期間：2025年12月〜2026年3月</a:t>
+              <a:t>分析対象期間：2025年12月〜2026年4月</a:t>
             </a:r>
             <a:endParaRPr lang="en-US" sz="1000" dirty="0"/>
           </a:p>
@@ -2706,7 +2706,7 @@
                 <a:ea typeface="Arial" pitchFamily="34" charset="-122"/>
                 <a:cs typeface="Arial" pitchFamily="34" charset="-120"/>
               </a:rPr>
-              <a:t>レビュー総数：137件</a:t>
+              <a:t>レビュー総数：68件</a:t>
             </a:r>
             <a:endParaRPr lang="en-US" sz="1000" dirty="0"/>
           </a:p>
@@ -2726,7 +2726,7 @@
                 <a:ea typeface="Arial" pitchFamily="34" charset="-122"/>
                 <a:cs typeface="Arial" pitchFamily="34" charset="-120"/>
               </a:rPr>
-              <a:t>作成日：2026年4月3日</a:t>
+              <a:t>作成日：2026年4月12日</a:t>
             </a:r>
             <a:endParaRPr lang="en-US" sz="1000" dirty="0"/>
           </a:p>
@@ -2905,7 +2905,7 @@
                 <a:ea typeface="Arial" pitchFamily="34" charset="-122"/>
                 <a:cs typeface="Arial" pitchFamily="34" charset="-120"/>
               </a:rPr>
-              <a:t>ハートンホテル東品川の2025年12月〜2026年3月口コミ分析（137件）では、総合評価8.48点（10pt換算）、高評価率81.8%という結果が得られました。</a:t>
+              <a:t>ハートンホテル東品川の2025年12月〜2026年4月口コミ分析（68件）では、総合評価8.43点（10pt換算）、高評価率80.9%という結果が得られました。</a:t>
             </a:r>
             <a:endParaRPr lang="en-US" sz="1200" dirty="0"/>
           </a:p>
@@ -2963,7 +2963,7 @@
                 <a:ea typeface="Arial" pitchFamily="34" charset="-122"/>
                 <a:cs typeface="Arial" pitchFamily="34" charset="-120"/>
               </a:rPr>
-              <a:t>6ヶ月以内に全体平均8.8点以上、高評価率87%以上を目指し、継続的な改善サイクルを確立することを推奨します。</a:t>
+              <a:t>6ヶ月以内に全体平均8.7点以上、高評価率86%以上を目指し、継続的な改善サイクルを確立することを推奨します。</a:t>
             </a:r>
             <a:endParaRPr lang="en-US" sz="1200" dirty="0"/>
           </a:p>
@@ -3309,7 +3309,7 @@
                 <a:ea typeface="Arial" pitchFamily="34" charset="-122"/>
                 <a:cs typeface="Arial" pitchFamily="34" charset="-120"/>
               </a:rPr>
-              <a:t>8.48</a:t>
+              <a:t>8.43</a:t>
             </a:r>
             <a:endParaRPr lang="en-US" sz="3200" dirty="0"/>
           </a:p>
@@ -3434,7 +3434,7 @@
                 <a:ea typeface="Arial" pitchFamily="34" charset="-122"/>
                 <a:cs typeface="Arial" pitchFamily="34" charset="-120"/>
               </a:rPr>
-              <a:t>81.8%</a:t>
+              <a:t>80.9%</a:t>
             </a:r>
             <a:endParaRPr lang="en-US" sz="3200" dirty="0"/>
           </a:p>
@@ -3684,7 +3684,7 @@
                 <a:ea typeface="Arial" pitchFamily="34" charset="-122"/>
                 <a:cs typeface="Arial" pitchFamily="34" charset="-120"/>
               </a:rPr>
-              <a:t>137件</a:t>
+              <a:t>68件</a:t>
             </a:r>
             <a:endParaRPr lang="en-US" sz="3200" dirty="0"/>
           </a:p>
@@ -3832,7 +3832,7 @@
                 <a:ea typeface="Arial" pitchFamily="34" charset="-122"/>
                 <a:cs typeface="Arial" pitchFamily="34" charset="-120"/>
               </a:rPr>
-              <a:t>  駅近・交通利便性に関する好評価（125件）</a:t>
+              <a:t>  駅近・交通利便性に関する好評価（58件）</a:t>
             </a:r>
             <a:endParaRPr lang="en-US" sz="1100" dirty="0"/>
           </a:p>
@@ -3872,7 +3872,7 @@
                 <a:ea typeface="Arial" pitchFamily="34" charset="-122"/>
                 <a:cs typeface="Arial" pitchFamily="34" charset="-120"/>
               </a:rPr>
-              <a:t>  客室の快適性・設備の充実度への好評（93件）</a:t>
+              <a:t>  客室の快適性・設備の充実度への好評（37件）</a:t>
             </a:r>
             <a:endParaRPr lang="en-US" sz="1100" dirty="0"/>
           </a:p>
@@ -3912,7 +3912,7 @@
                 <a:ea typeface="Arial" pitchFamily="34" charset="-122"/>
                 <a:cs typeface="Arial" pitchFamily="34" charset="-120"/>
               </a:rPr>
-              <a:t>  客室・共用部の清潔さへの高評価（57件）</a:t>
+              <a:t>  客室・共用部の清潔さへの高評価（25件）</a:t>
             </a:r>
             <a:endParaRPr lang="en-US" sz="1100" dirty="0"/>
           </a:p>
@@ -4120,7 +4120,7 @@
                 <a:ea typeface="Arial" pitchFamily="34" charset="-122"/>
                 <a:cs typeface="Arial" pitchFamily="34" charset="-120"/>
               </a:rPr>
-              <a:t>騒音問題 </a:t>
+              <a:t>口コミ返信率 </a:t>
             </a:r>
             <a:endParaRPr lang="en-US" sz="1100" dirty="0"/>
           </a:p>
@@ -4140,7 +4140,7 @@
                 <a:ea typeface="Arial" pitchFamily="34" charset="-122"/>
                 <a:cs typeface="Arial" pitchFamily="34" charset="-120"/>
               </a:rPr>
-              <a:t>  2件の指摘あり。改善対応を推奨</a:t>
+              <a:t>  継続的な品質管理・予防的対応を推奨</a:t>
             </a:r>
             <a:endParaRPr lang="en-US" sz="1100" dirty="0"/>
           </a:p>
@@ -4561,7 +4561,7 @@
                 <a:ea typeface="Arial" pitchFamily="34" charset="-122"/>
                 <a:cs typeface="Arial" pitchFamily="34" charset="-120"/>
               </a:rPr>
-              <a:t>Trip.com: 9.35点</a:t>
+              <a:t>Trip.com: 9.30点</a:t>
             </a:r>
             <a:endParaRPr lang="en-US" sz="1100" dirty="0"/>
           </a:p>
@@ -4610,7 +4610,7 @@
                 <a:ea typeface="Arial" pitchFamily="34" charset="-122"/>
                 <a:cs typeface="Arial" pitchFamily="34" charset="-120"/>
               </a:rPr>
-              <a:t>8.48点（10pt換算）</a:t>
+              <a:t>8.43点（10pt換算）</a:t>
             </a:r>
             <a:endParaRPr lang="en-US" sz="1100" dirty="0"/>
           </a:p>
@@ -5119,7 +5119,7 @@
                           <a:ea typeface="Arial" pitchFamily="34" charset="-122"/>
                           <a:cs typeface="Arial" pitchFamily="34" charset="-120"/>
                         </a:rPr>
-                        <a:t>23</a:t>
+                        <a:t>10</a:t>
                       </a:r>
                       <a:endParaRPr lang="en-US" sz="900" dirty="0">
                         <a:latin typeface="Arial" charset="0"/>
@@ -5187,7 +5187,7 @@
                           <a:ea typeface="Arial" pitchFamily="34" charset="-122"/>
                           <a:cs typeface="Arial" pitchFamily="34" charset="-120"/>
                         </a:rPr>
-                        <a:t>9.35</a:t>
+                        <a:t>9.30</a:t>
                       </a:r>
                       <a:endParaRPr lang="en-US" sz="900" dirty="0">
                         <a:latin typeface="Arial" charset="0"/>
@@ -5323,7 +5323,7 @@
                           <a:ea typeface="Arial" pitchFamily="34" charset="-122"/>
                           <a:cs typeface="Arial" pitchFamily="34" charset="-120"/>
                         </a:rPr>
-                        <a:t>9.35</a:t>
+                        <a:t>9.30</a:t>
                       </a:r>
                       <a:endParaRPr lang="en-US" sz="900" dirty="0">
                         <a:latin typeface="Arial" charset="0"/>
@@ -5461,7 +5461,7 @@
                           <a:ea typeface="Arial" pitchFamily="34" charset="-122"/>
                           <a:cs typeface="Arial" pitchFamily="34" charset="-120"/>
                         </a:rPr>
-                        <a:t>35</a:t>
+                        <a:t>14</a:t>
                       </a:r>
                       <a:endParaRPr lang="en-US" sz="900" dirty="0">
                         <a:latin typeface="Arial" charset="0"/>
@@ -5529,7 +5529,7 @@
                           <a:ea typeface="Arial" pitchFamily="34" charset="-122"/>
                           <a:cs typeface="Arial" pitchFamily="34" charset="-120"/>
                         </a:rPr>
-                        <a:t>4.29</a:t>
+                        <a:t>4.36</a:t>
                       </a:r>
                       <a:endParaRPr lang="en-US" sz="900" dirty="0">
                         <a:latin typeface="Arial" charset="0"/>
@@ -5665,7 +5665,7 @@
                           <a:ea typeface="Arial" pitchFamily="34" charset="-122"/>
                           <a:cs typeface="Arial" pitchFamily="34" charset="-120"/>
                         </a:rPr>
-                        <a:t>8.57</a:t>
+                        <a:t>8.71</a:t>
                       </a:r>
                       <a:endParaRPr lang="en-US" sz="900" dirty="0">
                         <a:latin typeface="Arial" charset="0"/>
@@ -5803,7 +5803,7 @@
                           <a:ea typeface="Arial" pitchFamily="34" charset="-122"/>
                           <a:cs typeface="Arial" pitchFamily="34" charset="-120"/>
                         </a:rPr>
-                        <a:t>27</a:t>
+                        <a:t>18</a:t>
                       </a:r>
                       <a:endParaRPr lang="en-US" sz="900" dirty="0">
                         <a:latin typeface="Arial" charset="0"/>
@@ -6077,7 +6077,7 @@
                           <a:ea typeface="Arial" pitchFamily="34" charset="-122"/>
                           <a:cs typeface="Arial" pitchFamily="34" charset="-120"/>
                         </a:rPr>
-                        <a:t>楽天トラベル</a:t>
+                        <a:t>Agoda</a:t>
                       </a:r>
                       <a:endParaRPr lang="en-US" sz="900" dirty="0">
                         <a:latin typeface="Arial" charset="0"/>
@@ -6145,7 +6145,7 @@
                           <a:ea typeface="Arial" pitchFamily="34" charset="-122"/>
                           <a:cs typeface="Arial" pitchFamily="34" charset="-120"/>
                         </a:rPr>
-                        <a:t>29</a:t>
+                        <a:t>5</a:t>
                       </a:r>
                       <a:endParaRPr lang="en-US" sz="900" dirty="0">
                         <a:latin typeface="Arial" charset="0"/>
@@ -6213,7 +6213,7 @@
                           <a:ea typeface="Arial" pitchFamily="34" charset="-122"/>
                           <a:cs typeface="Arial" pitchFamily="34" charset="-120"/>
                         </a:rPr>
-                        <a:t>4.21</a:t>
+                        <a:t>8.40</a:t>
                       </a:r>
                       <a:endParaRPr lang="en-US" sz="900" dirty="0">
                         <a:latin typeface="Arial" charset="0"/>
@@ -6261,6 +6261,348 @@
                     </a:lnB>
                     <a:solidFill>
                       <a:srgbClr val="FFFFFF"/>
+                    </a:solidFill>
+                  </a:tcPr>
+                </a:tc>
+                <a:tc>
+                  <a:txBody>
+                    <a:bodyPr/>
+                    <a:lstStyle/>
+                    <a:p>
+                      <a:pPr algn="ctr" indent="0" marL="0">
+                        <a:buNone/>
+                      </a:pPr>
+                      <a:r>
+                        <a:rPr lang="en-US" sz="900" dirty="0">
+                          <a:solidFill>
+                            <a:srgbClr val="000000"/>
+                          </a:solidFill>
+                          <a:latin typeface="Arial" pitchFamily="34" charset="0"/>
+                          <a:ea typeface="Arial" pitchFamily="34" charset="-122"/>
+                          <a:cs typeface="Arial" pitchFamily="34" charset="-120"/>
+                        </a:rPr>
+                        <a:t>/10</a:t>
+                      </a:r>
+                      <a:endParaRPr lang="en-US" sz="900" dirty="0">
+                        <a:latin typeface="Arial" charset="0"/>
+                        <a:ea typeface="Arial" charset="0"/>
+                        <a:cs typeface="Arial" charset="0"/>
+                      </a:endParaRPr>
+                    </a:p>
+                  </a:txBody>
+                  <a:tcPr marL="91440" marR="91440" marT="45720" marB="45720">
+                    <a:lnL w="6350" cap="flat" cmpd="sng" algn="ctr">
+                      <a:solidFill>
+                        <a:srgbClr val="CBD5E1"/>
+                      </a:solidFill>
+                      <a:prstDash val="solid"/>
+                      <a:round/>
+                      <a:headEnd type="none" w="med" len="med"/>
+                      <a:tailEnd type="none" w="med" len="med"/>
+                    </a:lnL>
+                    <a:lnR w="6350" cap="flat" cmpd="sng" algn="ctr">
+                      <a:solidFill>
+                        <a:srgbClr val="CBD5E1"/>
+                      </a:solidFill>
+                      <a:prstDash val="solid"/>
+                      <a:round/>
+                      <a:headEnd type="none" w="med" len="med"/>
+                      <a:tailEnd type="none" w="med" len="med"/>
+                    </a:lnR>
+                    <a:lnT w="6350" cap="flat" cmpd="sng" algn="ctr">
+                      <a:solidFill>
+                        <a:srgbClr val="CBD5E1"/>
+                      </a:solidFill>
+                      <a:prstDash val="solid"/>
+                      <a:round/>
+                      <a:headEnd type="none" w="med" len="med"/>
+                      <a:tailEnd type="none" w="med" len="med"/>
+                    </a:lnT>
+                    <a:lnB w="6350" cap="flat" cmpd="sng" algn="ctr">
+                      <a:solidFill>
+                        <a:srgbClr val="CBD5E1"/>
+                      </a:solidFill>
+                      <a:prstDash val="solid"/>
+                      <a:round/>
+                      <a:headEnd type="none" w="med" len="med"/>
+                      <a:tailEnd type="none" w="med" len="med"/>
+                    </a:lnB>
+                    <a:solidFill>
+                      <a:srgbClr val="FFFFFF"/>
+                    </a:solidFill>
+                  </a:tcPr>
+                </a:tc>
+                <a:tc>
+                  <a:txBody>
+                    <a:bodyPr/>
+                    <a:lstStyle/>
+                    <a:p>
+                      <a:pPr algn="ctr" indent="0" marL="0">
+                        <a:buNone/>
+                      </a:pPr>
+                      <a:r>
+                        <a:rPr lang="en-US" sz="900" dirty="0">
+                          <a:solidFill>
+                            <a:srgbClr val="000000"/>
+                          </a:solidFill>
+                          <a:latin typeface="Arial" pitchFamily="34" charset="0"/>
+                          <a:ea typeface="Arial" pitchFamily="34" charset="-122"/>
+                          <a:cs typeface="Arial" pitchFamily="34" charset="-120"/>
+                        </a:rPr>
+                        <a:t>8.40</a:t>
+                      </a:r>
+                      <a:endParaRPr lang="en-US" sz="900" dirty="0">
+                        <a:latin typeface="Arial" charset="0"/>
+                        <a:ea typeface="Arial" charset="0"/>
+                        <a:cs typeface="Arial" charset="0"/>
+                      </a:endParaRPr>
+                    </a:p>
+                  </a:txBody>
+                  <a:tcPr marL="91440" marR="91440" marT="45720" marB="45720">
+                    <a:lnL w="6350" cap="flat" cmpd="sng" algn="ctr">
+                      <a:solidFill>
+                        <a:srgbClr val="CBD5E1"/>
+                      </a:solidFill>
+                      <a:prstDash val="solid"/>
+                      <a:round/>
+                      <a:headEnd type="none" w="med" len="med"/>
+                      <a:tailEnd type="none" w="med" len="med"/>
+                    </a:lnL>
+                    <a:lnR w="6350" cap="flat" cmpd="sng" algn="ctr">
+                      <a:solidFill>
+                        <a:srgbClr val="CBD5E1"/>
+                      </a:solidFill>
+                      <a:prstDash val="solid"/>
+                      <a:round/>
+                      <a:headEnd type="none" w="med" len="med"/>
+                      <a:tailEnd type="none" w="med" len="med"/>
+                    </a:lnR>
+                    <a:lnT w="6350" cap="flat" cmpd="sng" algn="ctr">
+                      <a:solidFill>
+                        <a:srgbClr val="CBD5E1"/>
+                      </a:solidFill>
+                      <a:prstDash val="solid"/>
+                      <a:round/>
+                      <a:headEnd type="none" w="med" len="med"/>
+                      <a:tailEnd type="none" w="med" len="med"/>
+                    </a:lnT>
+                    <a:lnB w="6350" cap="flat" cmpd="sng" algn="ctr">
+                      <a:solidFill>
+                        <a:srgbClr val="CBD5E1"/>
+                      </a:solidFill>
+                      <a:prstDash val="solid"/>
+                      <a:round/>
+                      <a:headEnd type="none" w="med" len="med"/>
+                      <a:tailEnd type="none" w="med" len="med"/>
+                    </a:lnB>
+                    <a:solidFill>
+                      <a:srgbClr val="FFFFFF"/>
+                    </a:solidFill>
+                  </a:tcPr>
+                </a:tc>
+              </a:tr>
+              <a:tr h="201168">
+                <a:tc>
+                  <a:txBody>
+                    <a:bodyPr/>
+                    <a:lstStyle/>
+                    <a:p>
+                      <a:pPr algn="ctr" indent="0" marL="0">
+                        <a:buNone/>
+                      </a:pPr>
+                      <a:r>
+                        <a:rPr lang="en-US" sz="900" dirty="0">
+                          <a:solidFill>
+                            <a:srgbClr val="000000"/>
+                          </a:solidFill>
+                          <a:latin typeface="Arial" pitchFamily="34" charset="0"/>
+                          <a:ea typeface="Arial" pitchFamily="34" charset="-122"/>
+                          <a:cs typeface="Arial" pitchFamily="34" charset="-120"/>
+                        </a:rPr>
+                        <a:t>楽天トラベル</a:t>
+                      </a:r>
+                      <a:endParaRPr lang="en-US" sz="900" dirty="0">
+                        <a:latin typeface="Arial" charset="0"/>
+                        <a:ea typeface="Arial" charset="0"/>
+                        <a:cs typeface="Arial" charset="0"/>
+                      </a:endParaRPr>
+                    </a:p>
+                  </a:txBody>
+                  <a:tcPr marL="91440" marR="91440" marT="45720" marB="45720">
+                    <a:lnL w="6350" cap="flat" cmpd="sng" algn="ctr">
+                      <a:solidFill>
+                        <a:srgbClr val="CBD5E1"/>
+                      </a:solidFill>
+                      <a:prstDash val="solid"/>
+                      <a:round/>
+                      <a:headEnd type="none" w="med" len="med"/>
+                      <a:tailEnd type="none" w="med" len="med"/>
+                    </a:lnL>
+                    <a:lnR w="6350" cap="flat" cmpd="sng" algn="ctr">
+                      <a:solidFill>
+                        <a:srgbClr val="CBD5E1"/>
+                      </a:solidFill>
+                      <a:prstDash val="solid"/>
+                      <a:round/>
+                      <a:headEnd type="none" w="med" len="med"/>
+                      <a:tailEnd type="none" w="med" len="med"/>
+                    </a:lnR>
+                    <a:lnT w="6350" cap="flat" cmpd="sng" algn="ctr">
+                      <a:solidFill>
+                        <a:srgbClr val="CBD5E1"/>
+                      </a:solidFill>
+                      <a:prstDash val="solid"/>
+                      <a:round/>
+                      <a:headEnd type="none" w="med" len="med"/>
+                      <a:tailEnd type="none" w="med" len="med"/>
+                    </a:lnT>
+                    <a:lnB w="6350" cap="flat" cmpd="sng" algn="ctr">
+                      <a:solidFill>
+                        <a:srgbClr val="CBD5E1"/>
+                      </a:solidFill>
+                      <a:prstDash val="solid"/>
+                      <a:round/>
+                      <a:headEnd type="none" w="med" len="med"/>
+                      <a:tailEnd type="none" w="med" len="med"/>
+                    </a:lnB>
+                    <a:solidFill>
+                      <a:srgbClr val="E8EFF8"/>
+                    </a:solidFill>
+                  </a:tcPr>
+                </a:tc>
+                <a:tc>
+                  <a:txBody>
+                    <a:bodyPr/>
+                    <a:lstStyle/>
+                    <a:p>
+                      <a:pPr algn="ctr" indent="0" marL="0">
+                        <a:buNone/>
+                      </a:pPr>
+                      <a:r>
+                        <a:rPr lang="en-US" sz="900" dirty="0">
+                          <a:solidFill>
+                            <a:srgbClr val="000000"/>
+                          </a:solidFill>
+                          <a:latin typeface="Arial" pitchFamily="34" charset="0"/>
+                          <a:ea typeface="Arial" pitchFamily="34" charset="-122"/>
+                          <a:cs typeface="Arial" pitchFamily="34" charset="-120"/>
+                        </a:rPr>
+                        <a:t>14</a:t>
+                      </a:r>
+                      <a:endParaRPr lang="en-US" sz="900" dirty="0">
+                        <a:latin typeface="Arial" charset="0"/>
+                        <a:ea typeface="Arial" charset="0"/>
+                        <a:cs typeface="Arial" charset="0"/>
+                      </a:endParaRPr>
+                    </a:p>
+                  </a:txBody>
+                  <a:tcPr marL="91440" marR="91440" marT="45720" marB="45720">
+                    <a:lnL w="6350" cap="flat" cmpd="sng" algn="ctr">
+                      <a:solidFill>
+                        <a:srgbClr val="CBD5E1"/>
+                      </a:solidFill>
+                      <a:prstDash val="solid"/>
+                      <a:round/>
+                      <a:headEnd type="none" w="med" len="med"/>
+                      <a:tailEnd type="none" w="med" len="med"/>
+                    </a:lnL>
+                    <a:lnR w="6350" cap="flat" cmpd="sng" algn="ctr">
+                      <a:solidFill>
+                        <a:srgbClr val="CBD5E1"/>
+                      </a:solidFill>
+                      <a:prstDash val="solid"/>
+                      <a:round/>
+                      <a:headEnd type="none" w="med" len="med"/>
+                      <a:tailEnd type="none" w="med" len="med"/>
+                    </a:lnR>
+                    <a:lnT w="6350" cap="flat" cmpd="sng" algn="ctr">
+                      <a:solidFill>
+                        <a:srgbClr val="CBD5E1"/>
+                      </a:solidFill>
+                      <a:prstDash val="solid"/>
+                      <a:round/>
+                      <a:headEnd type="none" w="med" len="med"/>
+                      <a:tailEnd type="none" w="med" len="med"/>
+                    </a:lnT>
+                    <a:lnB w="6350" cap="flat" cmpd="sng" algn="ctr">
+                      <a:solidFill>
+                        <a:srgbClr val="CBD5E1"/>
+                      </a:solidFill>
+                      <a:prstDash val="solid"/>
+                      <a:round/>
+                      <a:headEnd type="none" w="med" len="med"/>
+                      <a:tailEnd type="none" w="med" len="med"/>
+                    </a:lnB>
+                    <a:solidFill>
+                      <a:srgbClr val="E8EFF8"/>
+                    </a:solidFill>
+                  </a:tcPr>
+                </a:tc>
+                <a:tc>
+                  <a:txBody>
+                    <a:bodyPr/>
+                    <a:lstStyle/>
+                    <a:p>
+                      <a:pPr algn="ctr" indent="0" marL="0">
+                        <a:buNone/>
+                      </a:pPr>
+                      <a:r>
+                        <a:rPr lang="en-US" sz="900" dirty="0">
+                          <a:solidFill>
+                            <a:srgbClr val="000000"/>
+                          </a:solidFill>
+                          <a:latin typeface="Arial" pitchFamily="34" charset="0"/>
+                          <a:ea typeface="Arial" pitchFamily="34" charset="-122"/>
+                          <a:cs typeface="Arial" pitchFamily="34" charset="-120"/>
+                        </a:rPr>
+                        <a:t>4.14</a:t>
+                      </a:r>
+                      <a:endParaRPr lang="en-US" sz="900" dirty="0">
+                        <a:latin typeface="Arial" charset="0"/>
+                        <a:ea typeface="Arial" charset="0"/>
+                        <a:cs typeface="Arial" charset="0"/>
+                      </a:endParaRPr>
+                    </a:p>
+                  </a:txBody>
+                  <a:tcPr marL="91440" marR="91440" marT="45720" marB="45720">
+                    <a:lnL w="6350" cap="flat" cmpd="sng" algn="ctr">
+                      <a:solidFill>
+                        <a:srgbClr val="CBD5E1"/>
+                      </a:solidFill>
+                      <a:prstDash val="solid"/>
+                      <a:round/>
+                      <a:headEnd type="none" w="med" len="med"/>
+                      <a:tailEnd type="none" w="med" len="med"/>
+                    </a:lnL>
+                    <a:lnR w="6350" cap="flat" cmpd="sng" algn="ctr">
+                      <a:solidFill>
+                        <a:srgbClr val="CBD5E1"/>
+                      </a:solidFill>
+                      <a:prstDash val="solid"/>
+                      <a:round/>
+                      <a:headEnd type="none" w="med" len="med"/>
+                      <a:tailEnd type="none" w="med" len="med"/>
+                    </a:lnR>
+                    <a:lnT w="6350" cap="flat" cmpd="sng" algn="ctr">
+                      <a:solidFill>
+                        <a:srgbClr val="CBD5E1"/>
+                      </a:solidFill>
+                      <a:prstDash val="solid"/>
+                      <a:round/>
+                      <a:headEnd type="none" w="med" len="med"/>
+                      <a:tailEnd type="none" w="med" len="med"/>
+                    </a:lnT>
+                    <a:lnB w="6350" cap="flat" cmpd="sng" algn="ctr">
+                      <a:solidFill>
+                        <a:srgbClr val="CBD5E1"/>
+                      </a:solidFill>
+                      <a:prstDash val="solid"/>
+                      <a:round/>
+                      <a:headEnd type="none" w="med" len="med"/>
+                      <a:tailEnd type="none" w="med" len="med"/>
+                    </a:lnB>
+                    <a:solidFill>
+                      <a:srgbClr val="E8EFF8"/>
                     </a:solidFill>
                   </a:tcPr>
                 </a:tc>
@@ -6328,144 +6670,6 @@
                       <a:tailEnd type="none" w="med" len="med"/>
                     </a:lnB>
                     <a:solidFill>
-                      <a:srgbClr val="FFFFFF"/>
-                    </a:solidFill>
-                  </a:tcPr>
-                </a:tc>
-                <a:tc>
-                  <a:txBody>
-                    <a:bodyPr/>
-                    <a:lstStyle/>
-                    <a:p>
-                      <a:pPr algn="ctr" indent="0" marL="0">
-                        <a:buNone/>
-                      </a:pPr>
-                      <a:r>
-                        <a:rPr lang="en-US" sz="900" dirty="0">
-                          <a:solidFill>
-                            <a:srgbClr val="000000"/>
-                          </a:solidFill>
-                          <a:latin typeface="Arial" pitchFamily="34" charset="0"/>
-                          <a:ea typeface="Arial" pitchFamily="34" charset="-122"/>
-                          <a:cs typeface="Arial" pitchFamily="34" charset="-120"/>
-                        </a:rPr>
-                        <a:t>8.41</a:t>
-                      </a:r>
-                      <a:endParaRPr lang="en-US" sz="900" dirty="0">
-                        <a:latin typeface="Arial" charset="0"/>
-                        <a:ea typeface="Arial" charset="0"/>
-                        <a:cs typeface="Arial" charset="0"/>
-                      </a:endParaRPr>
-                    </a:p>
-                  </a:txBody>
-                  <a:tcPr marL="91440" marR="91440" marT="45720" marB="45720">
-                    <a:lnL w="6350" cap="flat" cmpd="sng" algn="ctr">
-                      <a:solidFill>
-                        <a:srgbClr val="CBD5E1"/>
-                      </a:solidFill>
-                      <a:prstDash val="solid"/>
-                      <a:round/>
-                      <a:headEnd type="none" w="med" len="med"/>
-                      <a:tailEnd type="none" w="med" len="med"/>
-                    </a:lnL>
-                    <a:lnR w="6350" cap="flat" cmpd="sng" algn="ctr">
-                      <a:solidFill>
-                        <a:srgbClr val="CBD5E1"/>
-                      </a:solidFill>
-                      <a:prstDash val="solid"/>
-                      <a:round/>
-                      <a:headEnd type="none" w="med" len="med"/>
-                      <a:tailEnd type="none" w="med" len="med"/>
-                    </a:lnR>
-                    <a:lnT w="6350" cap="flat" cmpd="sng" algn="ctr">
-                      <a:solidFill>
-                        <a:srgbClr val="CBD5E1"/>
-                      </a:solidFill>
-                      <a:prstDash val="solid"/>
-                      <a:round/>
-                      <a:headEnd type="none" w="med" len="med"/>
-                      <a:tailEnd type="none" w="med" len="med"/>
-                    </a:lnT>
-                    <a:lnB w="6350" cap="flat" cmpd="sng" algn="ctr">
-                      <a:solidFill>
-                        <a:srgbClr val="CBD5E1"/>
-                      </a:solidFill>
-                      <a:prstDash val="solid"/>
-                      <a:round/>
-                      <a:headEnd type="none" w="med" len="med"/>
-                      <a:tailEnd type="none" w="med" len="med"/>
-                    </a:lnB>
-                    <a:solidFill>
-                      <a:srgbClr val="FFFFFF"/>
-                    </a:solidFill>
-                  </a:tcPr>
-                </a:tc>
-              </a:tr>
-              <a:tr h="201168">
-                <a:tc>
-                  <a:txBody>
-                    <a:bodyPr/>
-                    <a:lstStyle/>
-                    <a:p>
-                      <a:pPr algn="ctr" indent="0" marL="0">
-                        <a:buNone/>
-                      </a:pPr>
-                      <a:r>
-                        <a:rPr lang="en-US" sz="900" dirty="0">
-                          <a:solidFill>
-                            <a:srgbClr val="000000"/>
-                          </a:solidFill>
-                          <a:latin typeface="Arial" pitchFamily="34" charset="0"/>
-                          <a:ea typeface="Arial" pitchFamily="34" charset="-122"/>
-                          <a:cs typeface="Arial" pitchFamily="34" charset="-120"/>
-                        </a:rPr>
-                        <a:t>Agoda</a:t>
-                      </a:r>
-                      <a:endParaRPr lang="en-US" sz="900" dirty="0">
-                        <a:latin typeface="Arial" charset="0"/>
-                        <a:ea typeface="Arial" charset="0"/>
-                        <a:cs typeface="Arial" charset="0"/>
-                      </a:endParaRPr>
-                    </a:p>
-                  </a:txBody>
-                  <a:tcPr marL="91440" marR="91440" marT="45720" marB="45720">
-                    <a:lnL w="6350" cap="flat" cmpd="sng" algn="ctr">
-                      <a:solidFill>
-                        <a:srgbClr val="CBD5E1"/>
-                      </a:solidFill>
-                      <a:prstDash val="solid"/>
-                      <a:round/>
-                      <a:headEnd type="none" w="med" len="med"/>
-                      <a:tailEnd type="none" w="med" len="med"/>
-                    </a:lnL>
-                    <a:lnR w="6350" cap="flat" cmpd="sng" algn="ctr">
-                      <a:solidFill>
-                        <a:srgbClr val="CBD5E1"/>
-                      </a:solidFill>
-                      <a:prstDash val="solid"/>
-                      <a:round/>
-                      <a:headEnd type="none" w="med" len="med"/>
-                      <a:tailEnd type="none" w="med" len="med"/>
-                    </a:lnR>
-                    <a:lnT w="6350" cap="flat" cmpd="sng" algn="ctr">
-                      <a:solidFill>
-                        <a:srgbClr val="CBD5E1"/>
-                      </a:solidFill>
-                      <a:prstDash val="solid"/>
-                      <a:round/>
-                      <a:headEnd type="none" w="med" len="med"/>
-                      <a:tailEnd type="none" w="med" len="med"/>
-                    </a:lnT>
-                    <a:lnB w="6350" cap="flat" cmpd="sng" algn="ctr">
-                      <a:solidFill>
-                        <a:srgbClr val="CBD5E1"/>
-                      </a:solidFill>
-                      <a:prstDash val="solid"/>
-                      <a:round/>
-                      <a:headEnd type="none" w="med" len="med"/>
-                      <a:tailEnd type="none" w="med" len="med"/>
-                    </a:lnB>
-                    <a:solidFill>
                       <a:srgbClr val="E8EFF8"/>
                     </a:solidFill>
                   </a:tcPr>
@@ -6487,211 +6691,7 @@
                           <a:ea typeface="Arial" pitchFamily="34" charset="-122"/>
                           <a:cs typeface="Arial" pitchFamily="34" charset="-120"/>
                         </a:rPr>
-                        <a:t>12</a:t>
-                      </a:r>
-                      <a:endParaRPr lang="en-US" sz="900" dirty="0">
-                        <a:latin typeface="Arial" charset="0"/>
-                        <a:ea typeface="Arial" charset="0"/>
-                        <a:cs typeface="Arial" charset="0"/>
-                      </a:endParaRPr>
-                    </a:p>
-                  </a:txBody>
-                  <a:tcPr marL="91440" marR="91440" marT="45720" marB="45720">
-                    <a:lnL w="6350" cap="flat" cmpd="sng" algn="ctr">
-                      <a:solidFill>
-                        <a:srgbClr val="CBD5E1"/>
-                      </a:solidFill>
-                      <a:prstDash val="solid"/>
-                      <a:round/>
-                      <a:headEnd type="none" w="med" len="med"/>
-                      <a:tailEnd type="none" w="med" len="med"/>
-                    </a:lnL>
-                    <a:lnR w="6350" cap="flat" cmpd="sng" algn="ctr">
-                      <a:solidFill>
-                        <a:srgbClr val="CBD5E1"/>
-                      </a:solidFill>
-                      <a:prstDash val="solid"/>
-                      <a:round/>
-                      <a:headEnd type="none" w="med" len="med"/>
-                      <a:tailEnd type="none" w="med" len="med"/>
-                    </a:lnR>
-                    <a:lnT w="6350" cap="flat" cmpd="sng" algn="ctr">
-                      <a:solidFill>
-                        <a:srgbClr val="CBD5E1"/>
-                      </a:solidFill>
-                      <a:prstDash val="solid"/>
-                      <a:round/>
-                      <a:headEnd type="none" w="med" len="med"/>
-                      <a:tailEnd type="none" w="med" len="med"/>
-                    </a:lnT>
-                    <a:lnB w="6350" cap="flat" cmpd="sng" algn="ctr">
-                      <a:solidFill>
-                        <a:srgbClr val="CBD5E1"/>
-                      </a:solidFill>
-                      <a:prstDash val="solid"/>
-                      <a:round/>
-                      <a:headEnd type="none" w="med" len="med"/>
-                      <a:tailEnd type="none" w="med" len="med"/>
-                    </a:lnB>
-                    <a:solidFill>
-                      <a:srgbClr val="E8EFF8"/>
-                    </a:solidFill>
-                  </a:tcPr>
-                </a:tc>
-                <a:tc>
-                  <a:txBody>
-                    <a:bodyPr/>
-                    <a:lstStyle/>
-                    <a:p>
-                      <a:pPr algn="ctr" indent="0" marL="0">
-                        <a:buNone/>
-                      </a:pPr>
-                      <a:r>
-                        <a:rPr lang="en-US" sz="900" dirty="0">
-                          <a:solidFill>
-                            <a:srgbClr val="000000"/>
-                          </a:solidFill>
-                          <a:latin typeface="Arial" pitchFamily="34" charset="0"/>
-                          <a:ea typeface="Arial" pitchFamily="34" charset="-122"/>
-                          <a:cs typeface="Arial" pitchFamily="34" charset="-120"/>
-                        </a:rPr>
-                        <a:t>8.25</a:t>
-                      </a:r>
-                      <a:endParaRPr lang="en-US" sz="900" dirty="0">
-                        <a:latin typeface="Arial" charset="0"/>
-                        <a:ea typeface="Arial" charset="0"/>
-                        <a:cs typeface="Arial" charset="0"/>
-                      </a:endParaRPr>
-                    </a:p>
-                  </a:txBody>
-                  <a:tcPr marL="91440" marR="91440" marT="45720" marB="45720">
-                    <a:lnL w="6350" cap="flat" cmpd="sng" algn="ctr">
-                      <a:solidFill>
-                        <a:srgbClr val="CBD5E1"/>
-                      </a:solidFill>
-                      <a:prstDash val="solid"/>
-                      <a:round/>
-                      <a:headEnd type="none" w="med" len="med"/>
-                      <a:tailEnd type="none" w="med" len="med"/>
-                    </a:lnL>
-                    <a:lnR w="6350" cap="flat" cmpd="sng" algn="ctr">
-                      <a:solidFill>
-                        <a:srgbClr val="CBD5E1"/>
-                      </a:solidFill>
-                      <a:prstDash val="solid"/>
-                      <a:round/>
-                      <a:headEnd type="none" w="med" len="med"/>
-                      <a:tailEnd type="none" w="med" len="med"/>
-                    </a:lnR>
-                    <a:lnT w="6350" cap="flat" cmpd="sng" algn="ctr">
-                      <a:solidFill>
-                        <a:srgbClr val="CBD5E1"/>
-                      </a:solidFill>
-                      <a:prstDash val="solid"/>
-                      <a:round/>
-                      <a:headEnd type="none" w="med" len="med"/>
-                      <a:tailEnd type="none" w="med" len="med"/>
-                    </a:lnT>
-                    <a:lnB w="6350" cap="flat" cmpd="sng" algn="ctr">
-                      <a:solidFill>
-                        <a:srgbClr val="CBD5E1"/>
-                      </a:solidFill>
-                      <a:prstDash val="solid"/>
-                      <a:round/>
-                      <a:headEnd type="none" w="med" len="med"/>
-                      <a:tailEnd type="none" w="med" len="med"/>
-                    </a:lnB>
-                    <a:solidFill>
-                      <a:srgbClr val="E8EFF8"/>
-                    </a:solidFill>
-                  </a:tcPr>
-                </a:tc>
-                <a:tc>
-                  <a:txBody>
-                    <a:bodyPr/>
-                    <a:lstStyle/>
-                    <a:p>
-                      <a:pPr algn="ctr" indent="0" marL="0">
-                        <a:buNone/>
-                      </a:pPr>
-                      <a:r>
-                        <a:rPr lang="en-US" sz="900" dirty="0">
-                          <a:solidFill>
-                            <a:srgbClr val="000000"/>
-                          </a:solidFill>
-                          <a:latin typeface="Arial" pitchFamily="34" charset="0"/>
-                          <a:ea typeface="Arial" pitchFamily="34" charset="-122"/>
-                          <a:cs typeface="Arial" pitchFamily="34" charset="-120"/>
-                        </a:rPr>
-                        <a:t>/10</a:t>
-                      </a:r>
-                      <a:endParaRPr lang="en-US" sz="900" dirty="0">
-                        <a:latin typeface="Arial" charset="0"/>
-                        <a:ea typeface="Arial" charset="0"/>
-                        <a:cs typeface="Arial" charset="0"/>
-                      </a:endParaRPr>
-                    </a:p>
-                  </a:txBody>
-                  <a:tcPr marL="91440" marR="91440" marT="45720" marB="45720">
-                    <a:lnL w="6350" cap="flat" cmpd="sng" algn="ctr">
-                      <a:solidFill>
-                        <a:srgbClr val="CBD5E1"/>
-                      </a:solidFill>
-                      <a:prstDash val="solid"/>
-                      <a:round/>
-                      <a:headEnd type="none" w="med" len="med"/>
-                      <a:tailEnd type="none" w="med" len="med"/>
-                    </a:lnL>
-                    <a:lnR w="6350" cap="flat" cmpd="sng" algn="ctr">
-                      <a:solidFill>
-                        <a:srgbClr val="CBD5E1"/>
-                      </a:solidFill>
-                      <a:prstDash val="solid"/>
-                      <a:round/>
-                      <a:headEnd type="none" w="med" len="med"/>
-                      <a:tailEnd type="none" w="med" len="med"/>
-                    </a:lnR>
-                    <a:lnT w="6350" cap="flat" cmpd="sng" algn="ctr">
-                      <a:solidFill>
-                        <a:srgbClr val="CBD5E1"/>
-                      </a:solidFill>
-                      <a:prstDash val="solid"/>
-                      <a:round/>
-                      <a:headEnd type="none" w="med" len="med"/>
-                      <a:tailEnd type="none" w="med" len="med"/>
-                    </a:lnT>
-                    <a:lnB w="6350" cap="flat" cmpd="sng" algn="ctr">
-                      <a:solidFill>
-                        <a:srgbClr val="CBD5E1"/>
-                      </a:solidFill>
-                      <a:prstDash val="solid"/>
-                      <a:round/>
-                      <a:headEnd type="none" w="med" len="med"/>
-                      <a:tailEnd type="none" w="med" len="med"/>
-                    </a:lnB>
-                    <a:solidFill>
-                      <a:srgbClr val="E8EFF8"/>
-                    </a:solidFill>
-                  </a:tcPr>
-                </a:tc>
-                <a:tc>
-                  <a:txBody>
-                    <a:bodyPr/>
-                    <a:lstStyle/>
-                    <a:p>
-                      <a:pPr algn="ctr" indent="0" marL="0">
-                        <a:buNone/>
-                      </a:pPr>
-                      <a:r>
-                        <a:rPr lang="en-US" sz="900" dirty="0">
-                          <a:solidFill>
-                            <a:srgbClr val="000000"/>
-                          </a:solidFill>
-                          <a:latin typeface="Arial" pitchFamily="34" charset="0"/>
-                          <a:ea typeface="Arial" pitchFamily="34" charset="-122"/>
-                          <a:cs typeface="Arial" pitchFamily="34" charset="-120"/>
-                        </a:rPr>
-                        <a:t>8.25</a:t>
+                        <a:t>8.29</a:t>
                       </a:r>
                       <a:endParaRPr lang="en-US" sz="900" dirty="0">
                         <a:latin typeface="Arial" charset="0"/>
@@ -6829,7 +6829,7 @@
                           <a:ea typeface="Arial" pitchFamily="34" charset="-122"/>
                           <a:cs typeface="Arial" pitchFamily="34" charset="-120"/>
                         </a:rPr>
-                        <a:t>11</a:t>
+                        <a:t>7</a:t>
                       </a:r>
                       <a:endParaRPr lang="en-US" sz="900" dirty="0">
                         <a:latin typeface="Arial" charset="0"/>
@@ -6897,7 +6897,7 @@
                           <a:ea typeface="Arial" pitchFamily="34" charset="-122"/>
                           <a:cs typeface="Arial" pitchFamily="34" charset="-120"/>
                         </a:rPr>
-                        <a:t>3.45</a:t>
+                        <a:t>3.43</a:t>
                       </a:r>
                       <a:endParaRPr lang="en-US" sz="900" dirty="0">
                         <a:latin typeface="Arial" charset="0"/>
@@ -7033,7 +7033,7 @@
                           <a:ea typeface="Arial" pitchFamily="34" charset="-122"/>
                           <a:cs typeface="Arial" pitchFamily="34" charset="-120"/>
                         </a:rPr>
-                        <a:t>6.91</a:t>
+                        <a:t>6.86</a:t>
                       </a:r>
                       <a:endParaRPr lang="en-US" sz="900" dirty="0">
                         <a:latin typeface="Arial" charset="0"/>
@@ -7441,7 +7441,7 @@
                 <a:ea typeface="Arial" pitchFamily="34" charset="-122"/>
                 <a:cs typeface="Arial" pitchFamily="34" charset="-120"/>
               </a:rPr>
-              <a:t>112件（81.8%）</a:t>
+              <a:t>55件（80.9%）</a:t>
             </a:r>
             <a:endParaRPr lang="en-US" sz="1100" dirty="0"/>
           </a:p>
@@ -7539,7 +7539,7 @@
                 <a:ea typeface="Arial" pitchFamily="34" charset="-122"/>
                 <a:cs typeface="Arial" pitchFamily="34" charset="-120"/>
               </a:rPr>
-              <a:t>23件（16.8%）</a:t>
+              <a:t>12件（17.6%）</a:t>
             </a:r>
             <a:endParaRPr lang="en-US" sz="1100" dirty="0"/>
           </a:p>
@@ -7637,7 +7637,7 @@
                 <a:ea typeface="Arial" pitchFamily="34" charset="-122"/>
                 <a:cs typeface="Arial" pitchFamily="34" charset="-120"/>
               </a:rPr>
-              <a:t>2件（1.5%）</a:t>
+              <a:t>1件（1.5%）</a:t>
             </a:r>
             <a:endParaRPr lang="en-US" sz="1100" dirty="0"/>
           </a:p>
@@ -7971,7 +7971,7 @@
                 <a:ea typeface="Arial" pitchFamily="34" charset="-122"/>
                 <a:cs typeface="Arial" pitchFamily="34" charset="-120"/>
               </a:rPr>
-              <a:t>125件</a:t>
+              <a:t>58件</a:t>
             </a:r>
             <a:endParaRPr lang="en-US" sz="900" dirty="0"/>
           </a:p>
@@ -8194,7 +8194,7 @@
                 <a:ea typeface="Arial" pitchFamily="34" charset="-122"/>
                 <a:cs typeface="Arial" pitchFamily="34" charset="-120"/>
               </a:rPr>
-              <a:t>93件</a:t>
+              <a:t>37件</a:t>
             </a:r>
             <a:endParaRPr lang="en-US" sz="900" dirty="0"/>
           </a:p>
@@ -8417,7 +8417,7 @@
                 <a:ea typeface="Arial" pitchFamily="34" charset="-122"/>
                 <a:cs typeface="Arial" pitchFamily="34" charset="-120"/>
               </a:rPr>
-              <a:t>57件</a:t>
+              <a:t>25件</a:t>
             </a:r>
             <a:endParaRPr lang="en-US" sz="900" dirty="0"/>
           </a:p>
@@ -8640,7 +8640,7 @@
                 <a:ea typeface="Arial" pitchFamily="34" charset="-122"/>
                 <a:cs typeface="Arial" pitchFamily="34" charset="-120"/>
               </a:rPr>
-              <a:t>38件</a:t>
+              <a:t>22件</a:t>
             </a:r>
             <a:endParaRPr lang="en-US" sz="900" dirty="0"/>
           </a:p>
@@ -8863,7 +8863,7 @@
                 <a:ea typeface="Arial" pitchFamily="34" charset="-122"/>
                 <a:cs typeface="Arial" pitchFamily="34" charset="-120"/>
               </a:rPr>
-              <a:t>27件</a:t>
+              <a:t>21件</a:t>
             </a:r>
             <a:endParaRPr lang="en-US" sz="900" dirty="0"/>
           </a:p>
@@ -8878,6 +8878,229 @@
         <p:spPr>
           <a:xfrm>
             <a:off x="3429000" y="2953512"/>
+            <a:ext cx="1645920" cy="274320"/>
+          </a:xfrm>
+          <a:prstGeom prst="rect">
+            <a:avLst/>
+          </a:prstGeom>
+          <a:noFill/>
+          <a:ln/>
+        </p:spPr>
+        <p:txBody>
+          <a:bodyPr wrap="square" lIns="0" tIns="0" rIns="0" bIns="0" rtlCol="0" anchor="ctr"/>
+          <a:lstStyle/>
+          <a:p>
+            <a:pPr indent="0" marL="0">
+              <a:buNone/>
+            </a:pPr>
+            <a:r>
+              <a:rPr lang="en-US" sz="1300" b="1" dirty="0">
+                <a:solidFill>
+                  <a:srgbClr val="1A2744"/>
+                </a:solidFill>
+                <a:latin typeface="Arial" pitchFamily="34" charset="0"/>
+                <a:ea typeface="Arial" pitchFamily="34" charset="-122"/>
+                <a:cs typeface="Arial" pitchFamily="34" charset="-120"/>
+              </a:rPr>
+              <a:t>コスパ・リピート</a:t>
+            </a:r>
+            <a:endParaRPr lang="en-US" sz="1300" dirty="0"/>
+          </a:p>
+        </p:txBody>
+      </p:sp>
+      <p:sp>
+        <p:nvSpPr>
+          <p:cNvPr id="38" name="Text 36"/>
+          <p:cNvSpPr/>
+          <p:nvPr/>
+        </p:nvSpPr>
+        <p:spPr>
+          <a:xfrm>
+            <a:off x="3429000" y="3246120"/>
+            <a:ext cx="2377440" cy="365760"/>
+          </a:xfrm>
+          <a:prstGeom prst="rect">
+            <a:avLst/>
+          </a:prstGeom>
+          <a:noFill/>
+          <a:ln/>
+        </p:spPr>
+        <p:txBody>
+          <a:bodyPr wrap="square" lIns="0" tIns="0" rIns="0" bIns="0" rtlCol="0" anchor="ctr"/>
+          <a:lstStyle/>
+          <a:p>
+            <a:pPr indent="0" marL="0">
+              <a:buNone/>
+            </a:pPr>
+            <a:r>
+              <a:rPr lang="en-US" sz="900" dirty="0">
+                <a:solidFill>
+                  <a:srgbClr val="64748B"/>
+                </a:solidFill>
+                <a:latin typeface="Arial" pitchFamily="34" charset="0"/>
+                <a:ea typeface="Arial" pitchFamily="34" charset="-122"/>
+                <a:cs typeface="Arial" pitchFamily="34" charset="-120"/>
+              </a:rPr>
+              <a:t>価格対価値の高さとリピート意向</a:t>
+            </a:r>
+            <a:endParaRPr lang="en-US" sz="900" dirty="0"/>
+          </a:p>
+        </p:txBody>
+      </p:sp>
+      <p:sp>
+        <p:nvSpPr>
+          <p:cNvPr id="39" name="Text 37"/>
+          <p:cNvSpPr/>
+          <p:nvPr/>
+        </p:nvSpPr>
+        <p:spPr>
+          <a:xfrm>
+            <a:off x="3429000" y="3657600"/>
+            <a:ext cx="2377440" cy="640080"/>
+          </a:xfrm>
+          <a:prstGeom prst="rect">
+            <a:avLst/>
+          </a:prstGeom>
+          <a:noFill/>
+          <a:ln/>
+        </p:spPr>
+        <p:txBody>
+          <a:bodyPr wrap="square" lIns="0" tIns="0" rIns="0" bIns="0" rtlCol="0" anchor="ctr"/>
+          <a:lstStyle/>
+          <a:p>
+            <a:pPr indent="0" marL="0">
+              <a:buNone/>
+            </a:pPr>
+            <a:r>
+              <a:rPr lang="en-US" sz="900" i="1" dirty="0">
+                <a:solidFill>
+                  <a:srgbClr val="3B7DD8"/>
+                </a:solidFill>
+                <a:latin typeface="Arial" pitchFamily="34" charset="0"/>
+                <a:ea typeface="Arial" pitchFamily="34" charset="-122"/>
+                <a:cs typeface="Arial" pitchFamily="34" charset="-120"/>
+              </a:rPr>
+              <a:t>「ゾナブルでコスパは高いです。出張で寝るだけと考えるとかなりお」</a:t>
+            </a:r>
+            <a:endParaRPr lang="en-US" sz="900" dirty="0"/>
+          </a:p>
+        </p:txBody>
+      </p:sp>
+      <p:sp>
+        <p:nvSpPr>
+          <p:cNvPr id="40" name="Shape 38"/>
+          <p:cNvSpPr/>
+          <p:nvPr/>
+        </p:nvSpPr>
+        <p:spPr>
+          <a:xfrm>
+            <a:off x="6126480" y="2880360"/>
+            <a:ext cx="2651760" cy="1600200"/>
+          </a:xfrm>
+          <a:prstGeom prst="rect">
+            <a:avLst/>
+          </a:prstGeom>
+          <a:solidFill>
+            <a:srgbClr val="FFFFFF"/>
+          </a:solidFill>
+          <a:ln/>
+          <a:effectLst>
+            <a:outerShdw sx="100000" sy="100000" kx="0" ky="0" algn="bl" rotWithShape="0" blurRad="50800" dist="25400" dir="8100000">
+              <a:srgbClr val="000000">
+                <a:alpha val="10000"/>
+              </a:srgbClr>
+            </a:outerShdw>
+          </a:effectLst>
+        </p:spPr>
+      </p:sp>
+      <p:sp>
+        <p:nvSpPr>
+          <p:cNvPr id="41" name="Shape 39"/>
+          <p:cNvSpPr/>
+          <p:nvPr/>
+        </p:nvSpPr>
+        <p:spPr>
+          <a:xfrm>
+            <a:off x="6126480" y="2880360"/>
+            <a:ext cx="54864" cy="1600200"/>
+          </a:xfrm>
+          <a:prstGeom prst="rect">
+            <a:avLst/>
+          </a:prstGeom>
+          <a:solidFill>
+            <a:srgbClr val="16A34A"/>
+          </a:solidFill>
+          <a:ln/>
+        </p:spPr>
+      </p:sp>
+      <p:sp>
+        <p:nvSpPr>
+          <p:cNvPr id="42" name="Shape 40"/>
+          <p:cNvSpPr/>
+          <p:nvPr/>
+        </p:nvSpPr>
+        <p:spPr>
+          <a:xfrm>
+            <a:off x="7955280" y="2953512"/>
+            <a:ext cx="658368" cy="228600"/>
+          </a:xfrm>
+          <a:prstGeom prst="rect">
+            <a:avLst/>
+          </a:prstGeom>
+          <a:solidFill>
+            <a:srgbClr val="DCFCE7"/>
+          </a:solidFill>
+          <a:ln/>
+        </p:spPr>
+      </p:sp>
+      <p:sp>
+        <p:nvSpPr>
+          <p:cNvPr id="43" name="Text 41"/>
+          <p:cNvSpPr/>
+          <p:nvPr/>
+        </p:nvSpPr>
+        <p:spPr>
+          <a:xfrm>
+            <a:off x="7955280" y="2953512"/>
+            <a:ext cx="658368" cy="228600"/>
+          </a:xfrm>
+          <a:prstGeom prst="rect">
+            <a:avLst/>
+          </a:prstGeom>
+          <a:noFill/>
+          <a:ln/>
+        </p:spPr>
+        <p:txBody>
+          <a:bodyPr wrap="square" lIns="0" tIns="0" rIns="0" bIns="0" rtlCol="0" anchor="ctr"/>
+          <a:lstStyle/>
+          <a:p>
+            <a:pPr algn="ctr" indent="0" marL="0">
+              <a:buNone/>
+            </a:pPr>
+            <a:r>
+              <a:rPr lang="en-US" sz="900" b="1" dirty="0">
+                <a:solidFill>
+                  <a:srgbClr val="16A34A"/>
+                </a:solidFill>
+                <a:latin typeface="Arial" pitchFamily="34" charset="0"/>
+                <a:ea typeface="Arial" pitchFamily="34" charset="-122"/>
+                <a:cs typeface="Arial" pitchFamily="34" charset="-120"/>
+              </a:rPr>
+              <a:t>8件</a:t>
+            </a:r>
+            <a:endParaRPr lang="en-US" sz="900" dirty="0"/>
+          </a:p>
+        </p:txBody>
+      </p:sp>
+      <p:sp>
+        <p:nvSpPr>
+          <p:cNvPr id="44" name="Text 42"/>
+          <p:cNvSpPr/>
+          <p:nvPr/>
+        </p:nvSpPr>
+        <p:spPr>
+          <a:xfrm>
+            <a:off x="6263640" y="2953512"/>
             <a:ext cx="1645920" cy="274320"/>
           </a:xfrm>
           <a:prstGeom prst="rect">
@@ -8910,13 +9133,13 @@
       </p:sp>
       <p:sp>
         <p:nvSpPr>
-          <p:cNvPr id="38" name="Text 36"/>
-          <p:cNvSpPr/>
-          <p:nvPr/>
-        </p:nvSpPr>
-        <p:spPr>
-          <a:xfrm>
-            <a:off x="3429000" y="3246120"/>
+          <p:cNvPr id="45" name="Text 43"/>
+          <p:cNvSpPr/>
+          <p:nvPr/>
+        </p:nvSpPr>
+        <p:spPr>
+          <a:xfrm>
+            <a:off x="6263640" y="3246120"/>
             <a:ext cx="2377440" cy="365760"/>
           </a:xfrm>
           <a:prstGeom prst="rect">
@@ -8949,13 +9172,13 @@
       </p:sp>
       <p:sp>
         <p:nvSpPr>
-          <p:cNvPr id="39" name="Text 37"/>
-          <p:cNvSpPr/>
-          <p:nvPr/>
-        </p:nvSpPr>
-        <p:spPr>
-          <a:xfrm>
-            <a:off x="3429000" y="3657600"/>
+          <p:cNvPr id="46" name="Text 44"/>
+          <p:cNvSpPr/>
+          <p:nvPr/>
+        </p:nvSpPr>
+        <p:spPr>
+          <a:xfrm>
+            <a:off x="6263640" y="3657600"/>
             <a:ext cx="2377440" cy="640080"/>
           </a:xfrm>
           <a:prstGeom prst="rect">
@@ -8981,229 +9204,6 @@
                 <a:cs typeface="Arial" pitchFamily="34" charset="-120"/>
               </a:rPr>
               <a:t>「朝食が美味しく　駅が近い    対応が　気持ちよく」</a:t>
-            </a:r>
-            <a:endParaRPr lang="en-US" sz="900" dirty="0"/>
-          </a:p>
-        </p:txBody>
-      </p:sp>
-      <p:sp>
-        <p:nvSpPr>
-          <p:cNvPr id="40" name="Shape 38"/>
-          <p:cNvSpPr/>
-          <p:nvPr/>
-        </p:nvSpPr>
-        <p:spPr>
-          <a:xfrm>
-            <a:off x="6126480" y="2880360"/>
-            <a:ext cx="2651760" cy="1600200"/>
-          </a:xfrm>
-          <a:prstGeom prst="rect">
-            <a:avLst/>
-          </a:prstGeom>
-          <a:solidFill>
-            <a:srgbClr val="FFFFFF"/>
-          </a:solidFill>
-          <a:ln/>
-          <a:effectLst>
-            <a:outerShdw sx="100000" sy="100000" kx="0" ky="0" algn="bl" rotWithShape="0" blurRad="50800" dist="25400" dir="8100000">
-              <a:srgbClr val="000000">
-                <a:alpha val="10000"/>
-              </a:srgbClr>
-            </a:outerShdw>
-          </a:effectLst>
-        </p:spPr>
-      </p:sp>
-      <p:sp>
-        <p:nvSpPr>
-          <p:cNvPr id="41" name="Shape 39"/>
-          <p:cNvSpPr/>
-          <p:nvPr/>
-        </p:nvSpPr>
-        <p:spPr>
-          <a:xfrm>
-            <a:off x="6126480" y="2880360"/>
-            <a:ext cx="54864" cy="1600200"/>
-          </a:xfrm>
-          <a:prstGeom prst="rect">
-            <a:avLst/>
-          </a:prstGeom>
-          <a:solidFill>
-            <a:srgbClr val="16A34A"/>
-          </a:solidFill>
-          <a:ln/>
-        </p:spPr>
-      </p:sp>
-      <p:sp>
-        <p:nvSpPr>
-          <p:cNvPr id="42" name="Shape 40"/>
-          <p:cNvSpPr/>
-          <p:nvPr/>
-        </p:nvSpPr>
-        <p:spPr>
-          <a:xfrm>
-            <a:off x="7955280" y="2953512"/>
-            <a:ext cx="658368" cy="228600"/>
-          </a:xfrm>
-          <a:prstGeom prst="rect">
-            <a:avLst/>
-          </a:prstGeom>
-          <a:solidFill>
-            <a:srgbClr val="DCFCE7"/>
-          </a:solidFill>
-          <a:ln/>
-        </p:spPr>
-      </p:sp>
-      <p:sp>
-        <p:nvSpPr>
-          <p:cNvPr id="43" name="Text 41"/>
-          <p:cNvSpPr/>
-          <p:nvPr/>
-        </p:nvSpPr>
-        <p:spPr>
-          <a:xfrm>
-            <a:off x="7955280" y="2953512"/>
-            <a:ext cx="658368" cy="228600"/>
-          </a:xfrm>
-          <a:prstGeom prst="rect">
-            <a:avLst/>
-          </a:prstGeom>
-          <a:noFill/>
-          <a:ln/>
-        </p:spPr>
-        <p:txBody>
-          <a:bodyPr wrap="square" lIns="0" tIns="0" rIns="0" bIns="0" rtlCol="0" anchor="ctr"/>
-          <a:lstStyle/>
-          <a:p>
-            <a:pPr algn="ctr" indent="0" marL="0">
-              <a:buNone/>
-            </a:pPr>
-            <a:r>
-              <a:rPr lang="en-US" sz="900" b="1" dirty="0">
-                <a:solidFill>
-                  <a:srgbClr val="16A34A"/>
-                </a:solidFill>
-                <a:latin typeface="Arial" pitchFamily="34" charset="0"/>
-                <a:ea typeface="Arial" pitchFamily="34" charset="-122"/>
-                <a:cs typeface="Arial" pitchFamily="34" charset="-120"/>
-              </a:rPr>
-              <a:t>27件</a:t>
-            </a:r>
-            <a:endParaRPr lang="en-US" sz="900" dirty="0"/>
-          </a:p>
-        </p:txBody>
-      </p:sp>
-      <p:sp>
-        <p:nvSpPr>
-          <p:cNvPr id="44" name="Text 42"/>
-          <p:cNvSpPr/>
-          <p:nvPr/>
-        </p:nvSpPr>
-        <p:spPr>
-          <a:xfrm>
-            <a:off x="6263640" y="2953512"/>
-            <a:ext cx="1645920" cy="274320"/>
-          </a:xfrm>
-          <a:prstGeom prst="rect">
-            <a:avLst/>
-          </a:prstGeom>
-          <a:noFill/>
-          <a:ln/>
-        </p:spPr>
-        <p:txBody>
-          <a:bodyPr wrap="square" lIns="0" tIns="0" rIns="0" bIns="0" rtlCol="0" anchor="ctr"/>
-          <a:lstStyle/>
-          <a:p>
-            <a:pPr indent="0" marL="0">
-              <a:buNone/>
-            </a:pPr>
-            <a:r>
-              <a:rPr lang="en-US" sz="1300" b="1" dirty="0">
-                <a:solidFill>
-                  <a:srgbClr val="1A2744"/>
-                </a:solidFill>
-                <a:latin typeface="Arial" pitchFamily="34" charset="0"/>
-                <a:ea typeface="Arial" pitchFamily="34" charset="-122"/>
-                <a:cs typeface="Arial" pitchFamily="34" charset="-120"/>
-              </a:rPr>
-              <a:t>コスパ・リピート</a:t>
-            </a:r>
-            <a:endParaRPr lang="en-US" sz="1300" dirty="0"/>
-          </a:p>
-        </p:txBody>
-      </p:sp>
-      <p:sp>
-        <p:nvSpPr>
-          <p:cNvPr id="45" name="Text 43"/>
-          <p:cNvSpPr/>
-          <p:nvPr/>
-        </p:nvSpPr>
-        <p:spPr>
-          <a:xfrm>
-            <a:off x="6263640" y="3246120"/>
-            <a:ext cx="2377440" cy="365760"/>
-          </a:xfrm>
-          <a:prstGeom prst="rect">
-            <a:avLst/>
-          </a:prstGeom>
-          <a:noFill/>
-          <a:ln/>
-        </p:spPr>
-        <p:txBody>
-          <a:bodyPr wrap="square" lIns="0" tIns="0" rIns="0" bIns="0" rtlCol="0" anchor="ctr"/>
-          <a:lstStyle/>
-          <a:p>
-            <a:pPr indent="0" marL="0">
-              <a:buNone/>
-            </a:pPr>
-            <a:r>
-              <a:rPr lang="en-US" sz="900" dirty="0">
-                <a:solidFill>
-                  <a:srgbClr val="64748B"/>
-                </a:solidFill>
-                <a:latin typeface="Arial" pitchFamily="34" charset="0"/>
-                <a:ea typeface="Arial" pitchFamily="34" charset="-122"/>
-                <a:cs typeface="Arial" pitchFamily="34" charset="-120"/>
-              </a:rPr>
-              <a:t>価格対価値の高さとリピート意向</a:t>
-            </a:r>
-            <a:endParaRPr lang="en-US" sz="900" dirty="0"/>
-          </a:p>
-        </p:txBody>
-      </p:sp>
-      <p:sp>
-        <p:nvSpPr>
-          <p:cNvPr id="46" name="Text 44"/>
-          <p:cNvSpPr/>
-          <p:nvPr/>
-        </p:nvSpPr>
-        <p:spPr>
-          <a:xfrm>
-            <a:off x="6263640" y="3657600"/>
-            <a:ext cx="2377440" cy="640080"/>
-          </a:xfrm>
-          <a:prstGeom prst="rect">
-            <a:avLst/>
-          </a:prstGeom>
-          <a:noFill/>
-          <a:ln/>
-        </p:spPr>
-        <p:txBody>
-          <a:bodyPr wrap="square" lIns="0" tIns="0" rIns="0" bIns="0" rtlCol="0" anchor="ctr"/>
-          <a:lstStyle/>
-          <a:p>
-            <a:pPr indent="0" marL="0">
-              <a:buNone/>
-            </a:pPr>
-            <a:r>
-              <a:rPr lang="en-US" sz="900" i="1" dirty="0">
-                <a:solidFill>
-                  <a:srgbClr val="3B7DD8"/>
-                </a:solidFill>
-                <a:latin typeface="Arial" pitchFamily="34" charset="0"/>
-                <a:ea typeface="Arial" pitchFamily="34" charset="-122"/>
-                <a:cs typeface="Arial" pitchFamily="34" charset="-120"/>
-              </a:rPr>
-              <a:t>「ゾナブルでコスパは高いです。出張で寝るだけと考えるとかなりお」</a:t>
             </a:r>
             <a:endParaRPr lang="en-US" sz="900" dirty="0"/>
           </a:p>
@@ -10373,7 +10373,7 @@
                           <a:ea typeface="Arial" pitchFamily="34" charset="-122"/>
                           <a:cs typeface="Arial" pitchFamily="34" charset="-120"/>
                         </a:rPr>
-                        <a:t>騒音問題</a:t>
+                        <a:t>口コミ返信率</a:t>
                       </a:r>
                       <a:endParaRPr lang="en-US" sz="900" dirty="0">
                         <a:latin typeface="Arial" charset="0"/>
@@ -10441,7 +10441,7 @@
                           <a:ea typeface="Arial" pitchFamily="34" charset="-122"/>
                           <a:cs typeface="Arial" pitchFamily="34" charset="-120"/>
                         </a:rPr>
-                        <a:t>バス周りの音が煩ったのでよく眠れなかった</a:t>
+                        <a:t>口コミへの返信対応を強化する余地あり</a:t>
                       </a:r>
                       <a:endParaRPr lang="en-US" sz="900" dirty="0">
                         <a:latin typeface="Arial" charset="0"/>
@@ -10509,7 +10509,555 @@
                           <a:ea typeface="Arial" pitchFamily="34" charset="-122"/>
                           <a:cs typeface="Arial" pitchFamily="34" charset="-120"/>
                         </a:rPr>
-                        <a:t>2件</a:t>
+                        <a:t>0件</a:t>
+                      </a:r>
+                      <a:endParaRPr lang="en-US" sz="900" dirty="0">
+                        <a:latin typeface="Arial" charset="0"/>
+                        <a:ea typeface="Arial" charset="0"/>
+                        <a:cs typeface="Arial" charset="0"/>
+                      </a:endParaRPr>
+                    </a:p>
+                  </a:txBody>
+                  <a:tcPr marL="91440" marR="91440" marT="45720" marB="45720">
+                    <a:lnL w="6350" cap="flat" cmpd="sng" algn="ctr">
+                      <a:solidFill>
+                        <a:srgbClr val="CBD5E1"/>
+                      </a:solidFill>
+                      <a:prstDash val="solid"/>
+                      <a:round/>
+                      <a:headEnd type="none" w="med" len="med"/>
+                      <a:tailEnd type="none" w="med" len="med"/>
+                    </a:lnL>
+                    <a:lnR w="6350" cap="flat" cmpd="sng" algn="ctr">
+                      <a:solidFill>
+                        <a:srgbClr val="CBD5E1"/>
+                      </a:solidFill>
+                      <a:prstDash val="solid"/>
+                      <a:round/>
+                      <a:headEnd type="none" w="med" len="med"/>
+                      <a:tailEnd type="none" w="med" len="med"/>
+                    </a:lnR>
+                    <a:lnT w="6350" cap="flat" cmpd="sng" algn="ctr">
+                      <a:solidFill>
+                        <a:srgbClr val="CBD5E1"/>
+                      </a:solidFill>
+                      <a:prstDash val="solid"/>
+                      <a:round/>
+                      <a:headEnd type="none" w="med" len="med"/>
+                      <a:tailEnd type="none" w="med" len="med"/>
+                    </a:lnT>
+                    <a:lnB w="6350" cap="flat" cmpd="sng" algn="ctr">
+                      <a:solidFill>
+                        <a:srgbClr val="CBD5E1"/>
+                      </a:solidFill>
+                      <a:prstDash val="solid"/>
+                      <a:round/>
+                      <a:headEnd type="none" w="med" len="med"/>
+                      <a:tailEnd type="none" w="med" len="med"/>
+                    </a:lnB>
+                    <a:solidFill>
+                      <a:srgbClr val="E8EFF8"/>
+                    </a:solidFill>
+                  </a:tcPr>
+                </a:tc>
+              </a:tr>
+              <a:tr h="320040">
+                <a:tc>
+                  <a:txBody>
+                    <a:bodyPr/>
+                    <a:lstStyle/>
+                    <a:p>
+                      <a:pPr algn="ctr" indent="0" marL="0">
+                        <a:buNone/>
+                      </a:pPr>
+                      <a:r>
+                        <a:rPr lang="en-US" sz="1200" b="1" dirty="0">
+                          <a:solidFill>
+                            <a:srgbClr val="94A3B8"/>
+                          </a:solidFill>
+                          <a:latin typeface="Arial" pitchFamily="34" charset="0"/>
+                          <a:ea typeface="Arial" pitchFamily="34" charset="-122"/>
+                          <a:cs typeface="Arial" pitchFamily="34" charset="-120"/>
+                        </a:rPr>
+                        <a:t>C</a:t>
+                      </a:r>
+                      <a:endParaRPr lang="en-US" sz="1200" dirty="0">
+                        <a:latin typeface="Arial" charset="0"/>
+                        <a:ea typeface="Arial" charset="0"/>
+                        <a:cs typeface="Arial" charset="0"/>
+                      </a:endParaRPr>
+                    </a:p>
+                  </a:txBody>
+                  <a:tcPr marL="91440" marR="91440" marT="45720" marB="45720">
+                    <a:lnL w="6350" cap="flat" cmpd="sng" algn="ctr">
+                      <a:solidFill>
+                        <a:srgbClr val="CBD5E1"/>
+                      </a:solidFill>
+                      <a:prstDash val="solid"/>
+                      <a:round/>
+                      <a:headEnd type="none" w="med" len="med"/>
+                      <a:tailEnd type="none" w="med" len="med"/>
+                    </a:lnL>
+                    <a:lnR w="6350" cap="flat" cmpd="sng" algn="ctr">
+                      <a:solidFill>
+                        <a:srgbClr val="CBD5E1"/>
+                      </a:solidFill>
+                      <a:prstDash val="solid"/>
+                      <a:round/>
+                      <a:headEnd type="none" w="med" len="med"/>
+                      <a:tailEnd type="none" w="med" len="med"/>
+                    </a:lnR>
+                    <a:lnT w="6350" cap="flat" cmpd="sng" algn="ctr">
+                      <a:solidFill>
+                        <a:srgbClr val="CBD5E1"/>
+                      </a:solidFill>
+                      <a:prstDash val="solid"/>
+                      <a:round/>
+                      <a:headEnd type="none" w="med" len="med"/>
+                      <a:tailEnd type="none" w="med" len="med"/>
+                    </a:lnT>
+                    <a:lnB w="6350" cap="flat" cmpd="sng" algn="ctr">
+                      <a:solidFill>
+                        <a:srgbClr val="CBD5E1"/>
+                      </a:solidFill>
+                      <a:prstDash val="solid"/>
+                      <a:round/>
+                      <a:headEnd type="none" w="med" len="med"/>
+                      <a:tailEnd type="none" w="med" len="med"/>
+                    </a:lnB>
+                    <a:solidFill>
+                      <a:srgbClr val="FFFFFF"/>
+                    </a:solidFill>
+                  </a:tcPr>
+                </a:tc>
+                <a:tc>
+                  <a:txBody>
+                    <a:bodyPr/>
+                    <a:lstStyle/>
+                    <a:p>
+                      <a:pPr indent="0" marL="0">
+                        <a:buNone/>
+                      </a:pPr>
+                      <a:r>
+                        <a:rPr lang="en-US" sz="900" b="1" dirty="0">
+                          <a:solidFill>
+                            <a:srgbClr val="334155"/>
+                          </a:solidFill>
+                          <a:latin typeface="Arial" pitchFamily="34" charset="0"/>
+                          <a:ea typeface="Arial" pitchFamily="34" charset="-122"/>
+                          <a:cs typeface="Arial" pitchFamily="34" charset="-120"/>
+                        </a:rPr>
+                        <a:t>サービス改善</a:t>
+                      </a:r>
+                      <a:endParaRPr lang="en-US" sz="900" dirty="0">
+                        <a:latin typeface="Arial" charset="0"/>
+                        <a:ea typeface="Arial" charset="0"/>
+                        <a:cs typeface="Arial" charset="0"/>
+                      </a:endParaRPr>
+                    </a:p>
+                  </a:txBody>
+                  <a:tcPr marL="91440" marR="91440" marT="45720" marB="45720">
+                    <a:lnL w="6350" cap="flat" cmpd="sng" algn="ctr">
+                      <a:solidFill>
+                        <a:srgbClr val="CBD5E1"/>
+                      </a:solidFill>
+                      <a:prstDash val="solid"/>
+                      <a:round/>
+                      <a:headEnd type="none" w="med" len="med"/>
+                      <a:tailEnd type="none" w="med" len="med"/>
+                    </a:lnL>
+                    <a:lnR w="6350" cap="flat" cmpd="sng" algn="ctr">
+                      <a:solidFill>
+                        <a:srgbClr val="CBD5E1"/>
+                      </a:solidFill>
+                      <a:prstDash val="solid"/>
+                      <a:round/>
+                      <a:headEnd type="none" w="med" len="med"/>
+                      <a:tailEnd type="none" w="med" len="med"/>
+                    </a:lnR>
+                    <a:lnT w="6350" cap="flat" cmpd="sng" algn="ctr">
+                      <a:solidFill>
+                        <a:srgbClr val="CBD5E1"/>
+                      </a:solidFill>
+                      <a:prstDash val="solid"/>
+                      <a:round/>
+                      <a:headEnd type="none" w="med" len="med"/>
+                      <a:tailEnd type="none" w="med" len="med"/>
+                    </a:lnT>
+                    <a:lnB w="6350" cap="flat" cmpd="sng" algn="ctr">
+                      <a:solidFill>
+                        <a:srgbClr val="CBD5E1"/>
+                      </a:solidFill>
+                      <a:prstDash val="solid"/>
+                      <a:round/>
+                      <a:headEnd type="none" w="med" len="med"/>
+                      <a:tailEnd type="none" w="med" len="med"/>
+                    </a:lnB>
+                    <a:solidFill>
+                      <a:srgbClr val="FFFFFF"/>
+                    </a:solidFill>
+                  </a:tcPr>
+                </a:tc>
+                <a:tc>
+                  <a:txBody>
+                    <a:bodyPr/>
+                    <a:lstStyle/>
+                    <a:p>
+                      <a:pPr indent="0" marL="0">
+                        <a:buNone/>
+                      </a:pPr>
+                      <a:r>
+                        <a:rPr lang="en-US" sz="900" dirty="0">
+                          <a:solidFill>
+                            <a:srgbClr val="64748B"/>
+                          </a:solidFill>
+                          <a:latin typeface="Arial" pitchFamily="34" charset="0"/>
+                          <a:ea typeface="Arial" pitchFamily="34" charset="-122"/>
+                          <a:cs typeface="Arial" pitchFamily="34" charset="-120"/>
+                        </a:rPr>
+                        <a:t>継続的なサービス品質向上が必要</a:t>
+                      </a:r>
+                      <a:endParaRPr lang="en-US" sz="900" dirty="0">
+                        <a:latin typeface="Arial" charset="0"/>
+                        <a:ea typeface="Arial" charset="0"/>
+                        <a:cs typeface="Arial" charset="0"/>
+                      </a:endParaRPr>
+                    </a:p>
+                  </a:txBody>
+                  <a:tcPr marL="91440" marR="91440" marT="45720" marB="45720">
+                    <a:lnL w="6350" cap="flat" cmpd="sng" algn="ctr">
+                      <a:solidFill>
+                        <a:srgbClr val="CBD5E1"/>
+                      </a:solidFill>
+                      <a:prstDash val="solid"/>
+                      <a:round/>
+                      <a:headEnd type="none" w="med" len="med"/>
+                      <a:tailEnd type="none" w="med" len="med"/>
+                    </a:lnL>
+                    <a:lnR w="6350" cap="flat" cmpd="sng" algn="ctr">
+                      <a:solidFill>
+                        <a:srgbClr val="CBD5E1"/>
+                      </a:solidFill>
+                      <a:prstDash val="solid"/>
+                      <a:round/>
+                      <a:headEnd type="none" w="med" len="med"/>
+                      <a:tailEnd type="none" w="med" len="med"/>
+                    </a:lnR>
+                    <a:lnT w="6350" cap="flat" cmpd="sng" algn="ctr">
+                      <a:solidFill>
+                        <a:srgbClr val="CBD5E1"/>
+                      </a:solidFill>
+                      <a:prstDash val="solid"/>
+                      <a:round/>
+                      <a:headEnd type="none" w="med" len="med"/>
+                      <a:tailEnd type="none" w="med" len="med"/>
+                    </a:lnT>
+                    <a:lnB w="6350" cap="flat" cmpd="sng" algn="ctr">
+                      <a:solidFill>
+                        <a:srgbClr val="CBD5E1"/>
+                      </a:solidFill>
+                      <a:prstDash val="solid"/>
+                      <a:round/>
+                      <a:headEnd type="none" w="med" len="med"/>
+                      <a:tailEnd type="none" w="med" len="med"/>
+                    </a:lnB>
+                    <a:solidFill>
+                      <a:srgbClr val="FFFFFF"/>
+                    </a:solidFill>
+                  </a:tcPr>
+                </a:tc>
+                <a:tc>
+                  <a:txBody>
+                    <a:bodyPr/>
+                    <a:lstStyle/>
+                    <a:p>
+                      <a:pPr algn="ctr" indent="0" marL="0">
+                        <a:buNone/>
+                      </a:pPr>
+                      <a:r>
+                        <a:rPr lang="en-US" sz="900" dirty="0">
+                          <a:solidFill>
+                            <a:srgbClr val="334155"/>
+                          </a:solidFill>
+                          <a:latin typeface="Arial" pitchFamily="34" charset="0"/>
+                          <a:ea typeface="Arial" pitchFamily="34" charset="-122"/>
+                          <a:cs typeface="Arial" pitchFamily="34" charset="-120"/>
+                        </a:rPr>
+                        <a:t>0件</a:t>
+                      </a:r>
+                      <a:endParaRPr lang="en-US" sz="900" dirty="0">
+                        <a:latin typeface="Arial" charset="0"/>
+                        <a:ea typeface="Arial" charset="0"/>
+                        <a:cs typeface="Arial" charset="0"/>
+                      </a:endParaRPr>
+                    </a:p>
+                  </a:txBody>
+                  <a:tcPr marL="91440" marR="91440" marT="45720" marB="45720">
+                    <a:lnL w="6350" cap="flat" cmpd="sng" algn="ctr">
+                      <a:solidFill>
+                        <a:srgbClr val="CBD5E1"/>
+                      </a:solidFill>
+                      <a:prstDash val="solid"/>
+                      <a:round/>
+                      <a:headEnd type="none" w="med" len="med"/>
+                      <a:tailEnd type="none" w="med" len="med"/>
+                    </a:lnL>
+                    <a:lnR w="6350" cap="flat" cmpd="sng" algn="ctr">
+                      <a:solidFill>
+                        <a:srgbClr val="CBD5E1"/>
+                      </a:solidFill>
+                      <a:prstDash val="solid"/>
+                      <a:round/>
+                      <a:headEnd type="none" w="med" len="med"/>
+                      <a:tailEnd type="none" w="med" len="med"/>
+                    </a:lnR>
+                    <a:lnT w="6350" cap="flat" cmpd="sng" algn="ctr">
+                      <a:solidFill>
+                        <a:srgbClr val="CBD5E1"/>
+                      </a:solidFill>
+                      <a:prstDash val="solid"/>
+                      <a:round/>
+                      <a:headEnd type="none" w="med" len="med"/>
+                      <a:tailEnd type="none" w="med" len="med"/>
+                    </a:lnT>
+                    <a:lnB w="6350" cap="flat" cmpd="sng" algn="ctr">
+                      <a:solidFill>
+                        <a:srgbClr val="CBD5E1"/>
+                      </a:solidFill>
+                      <a:prstDash val="solid"/>
+                      <a:round/>
+                      <a:headEnd type="none" w="med" len="med"/>
+                      <a:tailEnd type="none" w="med" len="med"/>
+                    </a:lnB>
+                    <a:solidFill>
+                      <a:srgbClr val="FFFFFF"/>
+                    </a:solidFill>
+                  </a:tcPr>
+                </a:tc>
+              </a:tr>
+              <a:tr h="320040">
+                <a:tc>
+                  <a:txBody>
+                    <a:bodyPr/>
+                    <a:lstStyle/>
+                    <a:p>
+                      <a:pPr algn="ctr" indent="0" marL="0">
+                        <a:buNone/>
+                      </a:pPr>
+                      <a:r>
+                        <a:rPr lang="en-US" sz="1200" b="1" dirty="0">
+                          <a:solidFill>
+                            <a:srgbClr val="94A3B8"/>
+                          </a:solidFill>
+                          <a:latin typeface="Arial" pitchFamily="34" charset="0"/>
+                          <a:ea typeface="Arial" pitchFamily="34" charset="-122"/>
+                          <a:cs typeface="Arial" pitchFamily="34" charset="-120"/>
+                        </a:rPr>
+                        <a:t>C</a:t>
+                      </a:r>
+                      <a:endParaRPr lang="en-US" sz="1200" dirty="0">
+                        <a:latin typeface="Arial" charset="0"/>
+                        <a:ea typeface="Arial" charset="0"/>
+                        <a:cs typeface="Arial" charset="0"/>
+                      </a:endParaRPr>
+                    </a:p>
+                  </a:txBody>
+                  <a:tcPr marL="91440" marR="91440" marT="45720" marB="45720">
+                    <a:lnL w="6350" cap="flat" cmpd="sng" algn="ctr">
+                      <a:solidFill>
+                        <a:srgbClr val="CBD5E1"/>
+                      </a:solidFill>
+                      <a:prstDash val="solid"/>
+                      <a:round/>
+                      <a:headEnd type="none" w="med" len="med"/>
+                      <a:tailEnd type="none" w="med" len="med"/>
+                    </a:lnL>
+                    <a:lnR w="6350" cap="flat" cmpd="sng" algn="ctr">
+                      <a:solidFill>
+                        <a:srgbClr val="CBD5E1"/>
+                      </a:solidFill>
+                      <a:prstDash val="solid"/>
+                      <a:round/>
+                      <a:headEnd type="none" w="med" len="med"/>
+                      <a:tailEnd type="none" w="med" len="med"/>
+                    </a:lnR>
+                    <a:lnT w="6350" cap="flat" cmpd="sng" algn="ctr">
+                      <a:solidFill>
+                        <a:srgbClr val="CBD5E1"/>
+                      </a:solidFill>
+                      <a:prstDash val="solid"/>
+                      <a:round/>
+                      <a:headEnd type="none" w="med" len="med"/>
+                      <a:tailEnd type="none" w="med" len="med"/>
+                    </a:lnT>
+                    <a:lnB w="6350" cap="flat" cmpd="sng" algn="ctr">
+                      <a:solidFill>
+                        <a:srgbClr val="CBD5E1"/>
+                      </a:solidFill>
+                      <a:prstDash val="solid"/>
+                      <a:round/>
+                      <a:headEnd type="none" w="med" len="med"/>
+                      <a:tailEnd type="none" w="med" len="med"/>
+                    </a:lnB>
+                    <a:solidFill>
+                      <a:srgbClr val="E8EFF8"/>
+                    </a:solidFill>
+                  </a:tcPr>
+                </a:tc>
+                <a:tc>
+                  <a:txBody>
+                    <a:bodyPr/>
+                    <a:lstStyle/>
+                    <a:p>
+                      <a:pPr indent="0" marL="0">
+                        <a:buNone/>
+                      </a:pPr>
+                      <a:r>
+                        <a:rPr lang="en-US" sz="900" b="1" dirty="0">
+                          <a:solidFill>
+                            <a:srgbClr val="334155"/>
+                          </a:solidFill>
+                          <a:latin typeface="Arial" pitchFamily="34" charset="0"/>
+                          <a:ea typeface="Arial" pitchFamily="34" charset="-122"/>
+                          <a:cs typeface="Arial" pitchFamily="34" charset="-120"/>
+                        </a:rPr>
+                        <a:t>設備メンテナンス</a:t>
+                      </a:r>
+                      <a:endParaRPr lang="en-US" sz="900" dirty="0">
+                        <a:latin typeface="Arial" charset="0"/>
+                        <a:ea typeface="Arial" charset="0"/>
+                        <a:cs typeface="Arial" charset="0"/>
+                      </a:endParaRPr>
+                    </a:p>
+                  </a:txBody>
+                  <a:tcPr marL="91440" marR="91440" marT="45720" marB="45720">
+                    <a:lnL w="6350" cap="flat" cmpd="sng" algn="ctr">
+                      <a:solidFill>
+                        <a:srgbClr val="CBD5E1"/>
+                      </a:solidFill>
+                      <a:prstDash val="solid"/>
+                      <a:round/>
+                      <a:headEnd type="none" w="med" len="med"/>
+                      <a:tailEnd type="none" w="med" len="med"/>
+                    </a:lnL>
+                    <a:lnR w="6350" cap="flat" cmpd="sng" algn="ctr">
+                      <a:solidFill>
+                        <a:srgbClr val="CBD5E1"/>
+                      </a:solidFill>
+                      <a:prstDash val="solid"/>
+                      <a:round/>
+                      <a:headEnd type="none" w="med" len="med"/>
+                      <a:tailEnd type="none" w="med" len="med"/>
+                    </a:lnR>
+                    <a:lnT w="6350" cap="flat" cmpd="sng" algn="ctr">
+                      <a:solidFill>
+                        <a:srgbClr val="CBD5E1"/>
+                      </a:solidFill>
+                      <a:prstDash val="solid"/>
+                      <a:round/>
+                      <a:headEnd type="none" w="med" len="med"/>
+                      <a:tailEnd type="none" w="med" len="med"/>
+                    </a:lnT>
+                    <a:lnB w="6350" cap="flat" cmpd="sng" algn="ctr">
+                      <a:solidFill>
+                        <a:srgbClr val="CBD5E1"/>
+                      </a:solidFill>
+                      <a:prstDash val="solid"/>
+                      <a:round/>
+                      <a:headEnd type="none" w="med" len="med"/>
+                      <a:tailEnd type="none" w="med" len="med"/>
+                    </a:lnB>
+                    <a:solidFill>
+                      <a:srgbClr val="E8EFF8"/>
+                    </a:solidFill>
+                  </a:tcPr>
+                </a:tc>
+                <a:tc>
+                  <a:txBody>
+                    <a:bodyPr/>
+                    <a:lstStyle/>
+                    <a:p>
+                      <a:pPr indent="0" marL="0">
+                        <a:buNone/>
+                      </a:pPr>
+                      <a:r>
+                        <a:rPr lang="en-US" sz="900" dirty="0">
+                          <a:solidFill>
+                            <a:srgbClr val="64748B"/>
+                          </a:solidFill>
+                          <a:latin typeface="Arial" pitchFamily="34" charset="0"/>
+                          <a:ea typeface="Arial" pitchFamily="34" charset="-122"/>
+                          <a:cs typeface="Arial" pitchFamily="34" charset="-120"/>
+                        </a:rPr>
+                        <a:t>定期的なメンテナンス体制の整備</a:t>
+                      </a:r>
+                      <a:endParaRPr lang="en-US" sz="900" dirty="0">
+                        <a:latin typeface="Arial" charset="0"/>
+                        <a:ea typeface="Arial" charset="0"/>
+                        <a:cs typeface="Arial" charset="0"/>
+                      </a:endParaRPr>
+                    </a:p>
+                  </a:txBody>
+                  <a:tcPr marL="91440" marR="91440" marT="45720" marB="45720">
+                    <a:lnL w="6350" cap="flat" cmpd="sng" algn="ctr">
+                      <a:solidFill>
+                        <a:srgbClr val="CBD5E1"/>
+                      </a:solidFill>
+                      <a:prstDash val="solid"/>
+                      <a:round/>
+                      <a:headEnd type="none" w="med" len="med"/>
+                      <a:tailEnd type="none" w="med" len="med"/>
+                    </a:lnL>
+                    <a:lnR w="6350" cap="flat" cmpd="sng" algn="ctr">
+                      <a:solidFill>
+                        <a:srgbClr val="CBD5E1"/>
+                      </a:solidFill>
+                      <a:prstDash val="solid"/>
+                      <a:round/>
+                      <a:headEnd type="none" w="med" len="med"/>
+                      <a:tailEnd type="none" w="med" len="med"/>
+                    </a:lnR>
+                    <a:lnT w="6350" cap="flat" cmpd="sng" algn="ctr">
+                      <a:solidFill>
+                        <a:srgbClr val="CBD5E1"/>
+                      </a:solidFill>
+                      <a:prstDash val="solid"/>
+                      <a:round/>
+                      <a:headEnd type="none" w="med" len="med"/>
+                      <a:tailEnd type="none" w="med" len="med"/>
+                    </a:lnT>
+                    <a:lnB w="6350" cap="flat" cmpd="sng" algn="ctr">
+                      <a:solidFill>
+                        <a:srgbClr val="CBD5E1"/>
+                      </a:solidFill>
+                      <a:prstDash val="solid"/>
+                      <a:round/>
+                      <a:headEnd type="none" w="med" len="med"/>
+                      <a:tailEnd type="none" w="med" len="med"/>
+                    </a:lnB>
+                    <a:solidFill>
+                      <a:srgbClr val="E8EFF8"/>
+                    </a:solidFill>
+                  </a:tcPr>
+                </a:tc>
+                <a:tc>
+                  <a:txBody>
+                    <a:bodyPr/>
+                    <a:lstStyle/>
+                    <a:p>
+                      <a:pPr algn="ctr" indent="0" marL="0">
+                        <a:buNone/>
+                      </a:pPr>
+                      <a:r>
+                        <a:rPr lang="en-US" sz="900" dirty="0">
+                          <a:solidFill>
+                            <a:srgbClr val="334155"/>
+                          </a:solidFill>
+                          <a:latin typeface="Arial" pitchFamily="34" charset="0"/>
+                          <a:ea typeface="Arial" pitchFamily="34" charset="-122"/>
+                          <a:cs typeface="Arial" pitchFamily="34" charset="-120"/>
+                        </a:rPr>
+                        <a:t>0件</a:t>
                       </a:r>
                       <a:endParaRPr lang="en-US" sz="900" dirty="0">
                         <a:latin typeface="Arial" charset="0"/>
@@ -11241,7 +11789,7 @@
                 <a:ea typeface="Arial" pitchFamily="34" charset="-122"/>
                 <a:cs typeface="Arial" pitchFamily="34" charset="-120"/>
               </a:rPr>
-              <a:t>(2) 騒音対策の即時対応</a:t>
+              <a:t>(2) 口コミ返信率100%の実現</a:t>
             </a:r>
             <a:endParaRPr lang="en-US" sz="1200" dirty="0"/>
           </a:p>
@@ -11256,198 +11804,6 @@
         <p:spPr>
           <a:xfrm>
             <a:off x="4800600" y="1600200"/>
-            <a:ext cx="3657600" cy="1188720"/>
-          </a:xfrm>
-          <a:prstGeom prst="rect">
-            <a:avLst/>
-          </a:prstGeom>
-          <a:noFill/>
-          <a:ln/>
-        </p:spPr>
-        <p:txBody>
-          <a:bodyPr wrap="square" lIns="0" tIns="0" rIns="0" bIns="0" rtlCol="0" anchor="ctr"/>
-          <a:lstStyle/>
-          <a:p>
-            <a:pPr marL="342900" indent="-342900">
-              <a:spcAft>
-                <a:spcPts val="300"/>
-              </a:spcAft>
-              <a:buSzPct val="100000"/>
-              <a:buChar char="•"/>
-            </a:pPr>
-            <a:r>
-              <a:rPr lang="en-US" sz="900" dirty="0">
-                <a:solidFill>
-                  <a:srgbClr val="334155"/>
-                </a:solidFill>
-                <a:latin typeface="Arial" pitchFamily="34" charset="0"/>
-                <a:ea typeface="Arial" pitchFamily="34" charset="-122"/>
-                <a:cs typeface="Arial" pitchFamily="34" charset="-120"/>
-              </a:rPr>
-              <a:t>防音対策済み部屋の積極的案内</a:t>
-            </a:r>
-            <a:endParaRPr lang="en-US" sz="900" dirty="0"/>
-          </a:p>
-          <a:p>
-            <a:pPr marL="342900" indent="-342900">
-              <a:spcAft>
-                <a:spcPts val="300"/>
-              </a:spcAft>
-              <a:buSzPct val="100000"/>
-              <a:buChar char="•"/>
-            </a:pPr>
-            <a:r>
-              <a:rPr lang="en-US" sz="900" dirty="0">
-                <a:solidFill>
-                  <a:srgbClr val="334155"/>
-                </a:solidFill>
-                <a:latin typeface="Arial" pitchFamily="34" charset="0"/>
-                <a:ea typeface="Arial" pitchFamily="34" charset="-122"/>
-                <a:cs typeface="Arial" pitchFamily="34" charset="-120"/>
-              </a:rPr>
-              <a:t>チェックイン時の防音耳栓提供</a:t>
-            </a:r>
-            <a:endParaRPr lang="en-US" sz="900" dirty="0"/>
-          </a:p>
-          <a:p>
-            <a:pPr marL="342900" indent="-342900">
-              <a:spcAft>
-                <a:spcPts val="300"/>
-              </a:spcAft>
-              <a:buSzPct val="100000"/>
-              <a:buChar char="•"/>
-            </a:pPr>
-            <a:r>
-              <a:rPr lang="en-US" sz="900" dirty="0">
-                <a:solidFill>
-                  <a:srgbClr val="334155"/>
-                </a:solidFill>
-                <a:latin typeface="Arial" pitchFamily="34" charset="0"/>
-                <a:ea typeface="Arial" pitchFamily="34" charset="-122"/>
-                <a:cs typeface="Arial" pitchFamily="34" charset="-120"/>
-              </a:rPr>
-              <a:t>騒音クレーム対応マニュアルの整備</a:t>
-            </a:r>
-            <a:endParaRPr lang="en-US" sz="900" dirty="0"/>
-          </a:p>
-          <a:p>
-            <a:pPr marL="342900" indent="-342900">
-              <a:spcAft>
-                <a:spcPts val="300"/>
-              </a:spcAft>
-              <a:buSzPct val="100000"/>
-              <a:buChar char="•"/>
-            </a:pPr>
-            <a:r>
-              <a:rPr lang="en-US" sz="900" dirty="0">
-                <a:solidFill>
-                  <a:srgbClr val="334155"/>
-                </a:solidFill>
-                <a:latin typeface="Arial" pitchFamily="34" charset="0"/>
-                <a:ea typeface="Arial" pitchFamily="34" charset="-122"/>
-                <a:cs typeface="Arial" pitchFamily="34" charset="-120"/>
-              </a:rPr>
-              <a:t>防音性能の高い部屋への優先アサイン</a:t>
-            </a:r>
-            <a:endParaRPr lang="en-US" sz="900" dirty="0"/>
-          </a:p>
-        </p:txBody>
-      </p:sp>
-      <p:sp>
-        <p:nvSpPr>
-          <p:cNvPr id="14" name="Shape 12"/>
-          <p:cNvSpPr/>
-          <p:nvPr/>
-        </p:nvSpPr>
-        <p:spPr>
-          <a:xfrm>
-            <a:off x="457200" y="3017520"/>
-            <a:ext cx="3977640" cy="1600200"/>
-          </a:xfrm>
-          <a:prstGeom prst="rect">
-            <a:avLst/>
-          </a:prstGeom>
-          <a:solidFill>
-            <a:srgbClr val="FFFFFF"/>
-          </a:solidFill>
-          <a:ln/>
-          <a:effectLst>
-            <a:outerShdw sx="100000" sy="100000" kx="0" ky="0" algn="bl" rotWithShape="0" blurRad="50800" dist="25400" dir="8100000">
-              <a:srgbClr val="000000">
-                <a:alpha val="10000"/>
-              </a:srgbClr>
-            </a:outerShdw>
-          </a:effectLst>
-        </p:spPr>
-      </p:sp>
-      <p:sp>
-        <p:nvSpPr>
-          <p:cNvPr id="15" name="Shape 13"/>
-          <p:cNvSpPr/>
-          <p:nvPr/>
-        </p:nvSpPr>
-        <p:spPr>
-          <a:xfrm>
-            <a:off x="457200" y="3017520"/>
-            <a:ext cx="54864" cy="1600200"/>
-          </a:xfrm>
-          <a:prstGeom prst="rect">
-            <a:avLst/>
-          </a:prstGeom>
-          <a:solidFill>
-            <a:srgbClr val="3B7DD8"/>
-          </a:solidFill>
-          <a:ln/>
-        </p:spPr>
-      </p:sp>
-      <p:sp>
-        <p:nvSpPr>
-          <p:cNvPr id="16" name="Text 14"/>
-          <p:cNvSpPr/>
-          <p:nvPr/>
-        </p:nvSpPr>
-        <p:spPr>
-          <a:xfrm>
-            <a:off x="594360" y="3063240"/>
-            <a:ext cx="3657600" cy="320040"/>
-          </a:xfrm>
-          <a:prstGeom prst="rect">
-            <a:avLst/>
-          </a:prstGeom>
-          <a:noFill/>
-          <a:ln/>
-        </p:spPr>
-        <p:txBody>
-          <a:bodyPr wrap="square" lIns="0" tIns="0" rIns="0" bIns="0" rtlCol="0" anchor="ctr"/>
-          <a:lstStyle/>
-          <a:p>
-            <a:pPr indent="0" marL="0">
-              <a:buNone/>
-            </a:pPr>
-            <a:r>
-              <a:rPr lang="en-US" sz="1200" b="1" dirty="0">
-                <a:solidFill>
-                  <a:srgbClr val="1A2744"/>
-                </a:solidFill>
-                <a:latin typeface="Arial" pitchFamily="34" charset="0"/>
-                <a:ea typeface="Arial" pitchFamily="34" charset="-122"/>
-                <a:cs typeface="Arial" pitchFamily="34" charset="-120"/>
-              </a:rPr>
-              <a:t>(3) 口コミ返信率100%の実現</a:t>
-            </a:r>
-            <a:endParaRPr lang="en-US" sz="1200" dirty="0"/>
-          </a:p>
-        </p:txBody>
-      </p:sp>
-      <p:sp>
-        <p:nvSpPr>
-          <p:cNvPr id="17" name="Text 15"/>
-          <p:cNvSpPr/>
-          <p:nvPr/>
-        </p:nvSpPr>
-        <p:spPr>
-          <a:xfrm>
-            <a:off x="594360" y="3383280"/>
             <a:ext cx="3657600" cy="1188720"/>
           </a:xfrm>
           <a:prstGeom prst="rect">
@@ -11526,7 +11882,7 @@
       </p:sp>
       <p:sp>
         <p:nvSpPr>
-          <p:cNvPr id="18" name="Shape 16"/>
+          <p:cNvPr id="14" name="Shape 12"/>
           <p:cNvSpPr/>
           <p:nvPr/>
         </p:nvSpPr>
@@ -11546,7 +11902,7 @@
       </p:sp>
       <p:sp>
         <p:nvSpPr>
-          <p:cNvPr id="19" name="Text 17"/>
+          <p:cNvPr id="15" name="Text 13"/>
           <p:cNvSpPr/>
           <p:nvPr/>
         </p:nvSpPr>
@@ -11585,7 +11941,7 @@
       </p:sp>
       <p:sp>
         <p:nvSpPr>
-          <p:cNvPr id="20" name="Text 18"/>
+          <p:cNvPr id="16" name="Text 14"/>
           <p:cNvSpPr/>
           <p:nvPr/>
         </p:nvSpPr>
@@ -11995,7 +12351,7 @@
                 <a:ea typeface="Arial" pitchFamily="34" charset="-122"/>
                 <a:cs typeface="Arial" pitchFamily="34" charset="-120"/>
               </a:rPr>
-              <a:t>防音設備の強化</a:t>
+              <a:t>OTA評価スコア向上施策</a:t>
             </a:r>
             <a:endParaRPr lang="en-US" sz="1000" dirty="0"/>
           </a:p>
@@ -12010,130 +12366,6 @@
         <p:spPr>
           <a:xfrm>
             <a:off x="640080" y="2761488"/>
-            <a:ext cx="3474720" cy="694944"/>
-          </a:xfrm>
-          <a:prstGeom prst="rect">
-            <a:avLst/>
-          </a:prstGeom>
-          <a:noFill/>
-          <a:ln/>
-        </p:spPr>
-        <p:txBody>
-          <a:bodyPr wrap="square" lIns="0" tIns="0" rIns="0" bIns="0" rtlCol="0" anchor="ctr"/>
-          <a:lstStyle/>
-          <a:p>
-            <a:pPr marL="342900" indent="-342900">
-              <a:spcAft>
-                <a:spcPts val="200"/>
-              </a:spcAft>
-              <a:buSzPct val="100000"/>
-              <a:buChar char="•"/>
-            </a:pPr>
-            <a:r>
-              <a:rPr lang="en-US" sz="900" dirty="0">
-                <a:solidFill>
-                  <a:srgbClr val="64748B"/>
-                </a:solidFill>
-                <a:latin typeface="Arial" pitchFamily="34" charset="0"/>
-                <a:ea typeface="Arial" pitchFamily="34" charset="-122"/>
-                <a:cs typeface="Arial" pitchFamily="34" charset="-120"/>
-              </a:rPr>
-              <a:t>防音カーテン・防音パネルの設置計画</a:t>
-            </a:r>
-            <a:endParaRPr lang="en-US" sz="900" dirty="0"/>
-          </a:p>
-          <a:p>
-            <a:pPr marL="342900" indent="-342900">
-              <a:spcAft>
-                <a:spcPts val="200"/>
-              </a:spcAft>
-              <a:buSzPct val="100000"/>
-              <a:buChar char="•"/>
-            </a:pPr>
-            <a:r>
-              <a:rPr lang="en-US" sz="900" dirty="0">
-                <a:solidFill>
-                  <a:srgbClr val="64748B"/>
-                </a:solidFill>
-                <a:latin typeface="Arial" pitchFamily="34" charset="0"/>
-                <a:ea typeface="Arial" pitchFamily="34" charset="-122"/>
-                <a:cs typeface="Arial" pitchFamily="34" charset="-120"/>
-              </a:rPr>
-              <a:t>騒音の多い部屋の用途転換検討</a:t>
-            </a:r>
-            <a:endParaRPr lang="en-US" sz="900" dirty="0"/>
-          </a:p>
-          <a:p>
-            <a:pPr marL="342900" indent="-342900">
-              <a:spcAft>
-                <a:spcPts val="200"/>
-              </a:spcAft>
-              <a:buSzPct val="100000"/>
-              <a:buChar char="•"/>
-            </a:pPr>
-            <a:r>
-              <a:rPr lang="en-US" sz="900" dirty="0">
-                <a:solidFill>
-                  <a:srgbClr val="64748B"/>
-                </a:solidFill>
-                <a:latin typeface="Arial" pitchFamily="34" charset="0"/>
-                <a:ea typeface="Arial" pitchFamily="34" charset="-122"/>
-                <a:cs typeface="Arial" pitchFamily="34" charset="-120"/>
-              </a:rPr>
-              <a:t>建物外部騒音対策の工事計画</a:t>
-            </a:r>
-            <a:endParaRPr lang="en-US" sz="900" dirty="0"/>
-          </a:p>
-        </p:txBody>
-      </p:sp>
-      <p:sp>
-        <p:nvSpPr>
-          <p:cNvPr id="12" name="Text 10"/>
-          <p:cNvSpPr/>
-          <p:nvPr/>
-        </p:nvSpPr>
-        <p:spPr>
-          <a:xfrm>
-            <a:off x="640080" y="3547872"/>
-            <a:ext cx="3474720" cy="274320"/>
-          </a:xfrm>
-          <a:prstGeom prst="rect">
-            <a:avLst/>
-          </a:prstGeom>
-          <a:noFill/>
-          <a:ln/>
-        </p:spPr>
-        <p:txBody>
-          <a:bodyPr wrap="square" lIns="0" tIns="0" rIns="0" bIns="0" rtlCol="0" anchor="ctr"/>
-          <a:lstStyle/>
-          <a:p>
-            <a:pPr indent="0" marL="0">
-              <a:buNone/>
-            </a:pPr>
-            <a:r>
-              <a:rPr lang="en-US" sz="1000" b="1" dirty="0">
-                <a:solidFill>
-                  <a:srgbClr val="1A2744"/>
-                </a:solidFill>
-                <a:latin typeface="Arial" pitchFamily="34" charset="0"/>
-                <a:ea typeface="Arial" pitchFamily="34" charset="-122"/>
-                <a:cs typeface="Arial" pitchFamily="34" charset="-120"/>
-              </a:rPr>
-              <a:t>OTA評価スコア向上施策</a:t>
-            </a:r>
-            <a:endParaRPr lang="en-US" sz="1000" dirty="0"/>
-          </a:p>
-        </p:txBody>
-      </p:sp>
-      <p:sp>
-        <p:nvSpPr>
-          <p:cNvPr id="13" name="Text 11"/>
-          <p:cNvSpPr/>
-          <p:nvPr/>
-        </p:nvSpPr>
-        <p:spPr>
-          <a:xfrm>
-            <a:off x="640080" y="3803904"/>
             <a:ext cx="3474720" cy="694944"/>
           </a:xfrm>
           <a:prstGeom prst="rect">
@@ -12212,7 +12444,7 @@
       </p:sp>
       <p:sp>
         <p:nvSpPr>
-          <p:cNvPr id="14" name="Shape 12"/>
+          <p:cNvPr id="12" name="Shape 10"/>
           <p:cNvSpPr/>
           <p:nvPr/>
         </p:nvSpPr>
@@ -12239,7 +12471,7 @@
       </p:sp>
       <p:sp>
         <p:nvSpPr>
-          <p:cNvPr id="15" name="Shape 13"/>
+          <p:cNvPr id="13" name="Shape 11"/>
           <p:cNvSpPr/>
           <p:nvPr/>
         </p:nvSpPr>
@@ -12259,7 +12491,7 @@
       </p:sp>
       <p:sp>
         <p:nvSpPr>
-          <p:cNvPr id="16" name="Text 14"/>
+          <p:cNvPr id="14" name="Text 12"/>
           <p:cNvSpPr/>
           <p:nvPr/>
         </p:nvSpPr>
@@ -12298,7 +12530,7 @@
       </p:sp>
       <p:sp>
         <p:nvSpPr>
-          <p:cNvPr id="17" name="Text 15"/>
+          <p:cNvPr id="15" name="Text 13"/>
           <p:cNvSpPr/>
           <p:nvPr/>
         </p:nvSpPr>
@@ -12337,7 +12569,7 @@
       </p:sp>
       <p:sp>
         <p:nvSpPr>
-          <p:cNvPr id="18" name="Text 16"/>
+          <p:cNvPr id="16" name="Text 14"/>
           <p:cNvSpPr/>
           <p:nvPr/>
         </p:nvSpPr>
@@ -12422,7 +12654,7 @@
       </p:sp>
       <p:sp>
         <p:nvSpPr>
-          <p:cNvPr id="19" name="Text 17"/>
+          <p:cNvPr id="17" name="Text 15"/>
           <p:cNvSpPr/>
           <p:nvPr/>
         </p:nvSpPr>
@@ -12461,7 +12693,7 @@
       </p:sp>
       <p:sp>
         <p:nvSpPr>
-          <p:cNvPr id="20" name="Text 18"/>
+          <p:cNvPr id="18" name="Text 16"/>
           <p:cNvSpPr/>
           <p:nvPr/>
         </p:nvSpPr>
@@ -12546,7 +12778,7 @@
       </p:sp>
       <p:sp>
         <p:nvSpPr>
-          <p:cNvPr id="21" name="Text 19"/>
+          <p:cNvPr id="19" name="Text 17"/>
           <p:cNvSpPr/>
           <p:nvPr/>
         </p:nvSpPr>
@@ -12585,7 +12817,7 @@
       </p:sp>
       <p:sp>
         <p:nvSpPr>
-          <p:cNvPr id="22" name="Text 20"/>
+          <p:cNvPr id="20" name="Text 18"/>
           <p:cNvSpPr/>
           <p:nvPr/>
         </p:nvSpPr>
@@ -12670,7 +12902,7 @@
       </p:sp>
       <p:sp>
         <p:nvSpPr>
-          <p:cNvPr id="23" name="Shape 21"/>
+          <p:cNvPr id="21" name="Shape 19"/>
           <p:cNvSpPr/>
           <p:nvPr/>
         </p:nvSpPr>
@@ -12690,7 +12922,7 @@
       </p:sp>
       <p:sp>
         <p:nvSpPr>
-          <p:cNvPr id="24" name="Text 22"/>
+          <p:cNvPr id="22" name="Text 20"/>
           <p:cNvSpPr/>
           <p:nvPr/>
         </p:nvSpPr>
@@ -12729,7 +12961,7 @@
       </p:sp>
       <p:sp>
         <p:nvSpPr>
-          <p:cNvPr id="25" name="Text 23"/>
+          <p:cNvPr id="23" name="Text 21"/>
           <p:cNvSpPr/>
           <p:nvPr/>
         </p:nvSpPr>
@@ -13284,7 +13516,7 @@
                           <a:ea typeface="Arial" pitchFamily="34" charset="-122"/>
                           <a:cs typeface="Arial" pitchFamily="34" charset="-120"/>
                         </a:rPr>
-                        <a:t>8.48点</a:t>
+                        <a:t>8.43点</a:t>
                       </a:r>
                       <a:endParaRPr lang="en-US" sz="1000" dirty="0">
                         <a:latin typeface="Arial" charset="0"/>
@@ -13352,7 +13584,7 @@
                           <a:ea typeface="Arial" pitchFamily="34" charset="-122"/>
                           <a:cs typeface="Arial" pitchFamily="34" charset="-120"/>
                         </a:rPr>
-                        <a:t>8.8点以上</a:t>
+                        <a:t>8.7点以上</a:t>
                       </a:r>
                       <a:endParaRPr lang="en-US" sz="1000" dirty="0">
                         <a:latin typeface="Arial" charset="0"/>
@@ -13558,7 +13790,7 @@
                           <a:ea typeface="Arial" pitchFamily="34" charset="-122"/>
                           <a:cs typeface="Arial" pitchFamily="34" charset="-120"/>
                         </a:rPr>
-                        <a:t>81.8%</a:t>
+                        <a:t>80.9%</a:t>
                       </a:r>
                       <a:endParaRPr lang="en-US" sz="1000" dirty="0">
                         <a:latin typeface="Arial" charset="0"/>
@@ -13626,7 +13858,7 @@
                           <a:ea typeface="Arial" pitchFamily="34" charset="-122"/>
                           <a:cs typeface="Arial" pitchFamily="34" charset="-120"/>
                         </a:rPr>
-                        <a:t>87%以上</a:t>
+                        <a:t>86%以上</a:t>
                       </a:r>
                       <a:endParaRPr lang="en-US" sz="1000" dirty="0">
                         <a:latin typeface="Arial" charset="0"/>
@@ -14380,7 +14612,7 @@
                           <a:ea typeface="Arial" pitchFamily="34" charset="-122"/>
                           <a:cs typeface="Arial" pitchFamily="34" charset="-120"/>
                         </a:rPr>
-                        <a:t>9.35/10点</a:t>
+                        <a:t>9.30/10点</a:t>
                       </a:r>
                       <a:endParaRPr lang="en-US" sz="1000" dirty="0">
                         <a:latin typeface="Arial" charset="0"/>
@@ -14654,7 +14886,7 @@
                           <a:ea typeface="Arial" pitchFamily="34" charset="-122"/>
                           <a:cs typeface="Arial" pitchFamily="34" charset="-120"/>
                         </a:rPr>
-                        <a:t>4.29/5点</a:t>
+                        <a:t>4.36/5点</a:t>
                       </a:r>
                       <a:endParaRPr lang="en-US" sz="1000" dirty="0">
                         <a:latin typeface="Arial" charset="0"/>
@@ -14722,7 +14954,7 @@
                           <a:ea typeface="Arial" pitchFamily="34" charset="-122"/>
                           <a:cs typeface="Arial" pitchFamily="34" charset="-120"/>
                         </a:rPr>
-                        <a:t>4.5/5点以上</a:t>
+                        <a:t>4.6/5点以上</a:t>
                       </a:r>
                       <a:endParaRPr lang="en-US" sz="1000" dirty="0">
                         <a:latin typeface="Arial" charset="0"/>
